--- a/recursos/Presentación.pptx
+++ b/recursos/Presentación.pptx
@@ -5,16 +5,17 @@
     <p:sldMasterId id="2147483659" r:id="rId1"/>
   </p:sldMasterIdLst>
   <p:notesMasterIdLst>
-    <p:notesMasterId r:id="rId9"/>
+    <p:notesMasterId r:id="rId10"/>
   </p:notesMasterIdLst>
   <p:sldIdLst>
     <p:sldId id="256" r:id="rId2"/>
     <p:sldId id="257" r:id="rId3"/>
     <p:sldId id="265" r:id="rId4"/>
-    <p:sldId id="266" r:id="rId5"/>
-    <p:sldId id="267" r:id="rId6"/>
-    <p:sldId id="268" r:id="rId7"/>
-    <p:sldId id="269" r:id="rId8"/>
+    <p:sldId id="270" r:id="rId5"/>
+    <p:sldId id="266" r:id="rId6"/>
+    <p:sldId id="267" r:id="rId7"/>
+    <p:sldId id="268" r:id="rId8"/>
+    <p:sldId id="269" r:id="rId9"/>
   </p:sldIdLst>
   <p:sldSz cx="9144000" cy="5143500" type="screen16x9"/>
   <p:notesSz cx="6858000" cy="9144000"/>
@@ -1123,7 +1124,7 @@
     </p:spTree>
     <p:extLst>
       <p:ext uri="{BB962C8B-B14F-4D97-AF65-F5344CB8AC3E}">
-        <p14:creationId xmlns:p14="http://schemas.microsoft.com/office/powerpoint/2010/main" val="4176532231"/>
+        <p14:creationId xmlns:p14="http://schemas.microsoft.com/office/powerpoint/2010/main" val="2313728663"/>
       </p:ext>
     </p:extLst>
   </p:cSld>
@@ -1232,7 +1233,7 @@
     </p:spTree>
     <p:extLst>
       <p:ext uri="{BB962C8B-B14F-4D97-AF65-F5344CB8AC3E}">
-        <p14:creationId xmlns:p14="http://schemas.microsoft.com/office/powerpoint/2010/main" val="1486134680"/>
+        <p14:creationId xmlns:p14="http://schemas.microsoft.com/office/powerpoint/2010/main" val="4176532231"/>
       </p:ext>
     </p:extLst>
   </p:cSld>
@@ -1341,6 +1342,115 @@
     </p:spTree>
     <p:extLst>
       <p:ext uri="{BB962C8B-B14F-4D97-AF65-F5344CB8AC3E}">
+        <p14:creationId xmlns:p14="http://schemas.microsoft.com/office/powerpoint/2010/main" val="1486134680"/>
+      </p:ext>
+    </p:extLst>
+  </p:cSld>
+  <p:clrMapOvr>
+    <a:masterClrMapping/>
+  </p:clrMapOvr>
+</p:notes>
+</file>
+
+<file path=ppt/notesSlides/notesSlide7.xml><?xml version="1.0" encoding="utf-8"?>
+<p:notes xmlns:a="http://schemas.openxmlformats.org/drawingml/2006/main" xmlns:r="http://schemas.openxmlformats.org/officeDocument/2006/relationships" xmlns:p="http://schemas.openxmlformats.org/presentationml/2006/main" showMasterSp="0" showMasterPhAnim="0">
+  <p:cSld>
+    <p:spTree>
+      <p:nvGrpSpPr>
+        <p:cNvPr id="1" name="Shape 55"/>
+        <p:cNvGrpSpPr/>
+        <p:nvPr/>
+      </p:nvGrpSpPr>
+      <p:grpSpPr>
+        <a:xfrm>
+          <a:off x="0" y="0"/>
+          <a:ext cx="0" cy="0"/>
+          <a:chOff x="0" y="0"/>
+          <a:chExt cx="0" cy="0"/>
+        </a:xfrm>
+      </p:grpSpPr>
+      <p:sp>
+        <p:nvSpPr>
+          <p:cNvPr id="56" name="Google Shape;56;g3d147a6bd48_0_0:notes"/>
+          <p:cNvSpPr>
+            <a:spLocks noGrp="1" noRot="1" noChangeAspect="1"/>
+          </p:cNvSpPr>
+          <p:nvPr>
+            <p:ph type="sldImg" idx="2"/>
+          </p:nvPr>
+        </p:nvSpPr>
+        <p:spPr>
+          <a:xfrm>
+            <a:off x="381000" y="685800"/>
+            <a:ext cx="6096000" cy="3429000"/>
+          </a:xfrm>
+          <a:custGeom>
+            <a:avLst/>
+            <a:gdLst/>
+            <a:ahLst/>
+            <a:cxnLst/>
+            <a:rect l="l" t="t" r="r" b="b"/>
+            <a:pathLst>
+              <a:path w="120000" h="120000" extrusionOk="0">
+                <a:moveTo>
+                  <a:pt x="0" y="0"/>
+                </a:moveTo>
+                <a:lnTo>
+                  <a:pt x="120000" y="0"/>
+                </a:lnTo>
+                <a:lnTo>
+                  <a:pt x="120000" y="120000"/>
+                </a:lnTo>
+                <a:lnTo>
+                  <a:pt x="0" y="120000"/>
+                </a:lnTo>
+                <a:close/>
+              </a:path>
+            </a:pathLst>
+          </a:custGeom>
+        </p:spPr>
+      </p:sp>
+      <p:sp>
+        <p:nvSpPr>
+          <p:cNvPr id="57" name="Google Shape;57;g3d147a6bd48_0_0:notes"/>
+          <p:cNvSpPr txBox="1">
+            <a:spLocks noGrp="1"/>
+          </p:cNvSpPr>
+          <p:nvPr>
+            <p:ph type="body" idx="1"/>
+          </p:nvPr>
+        </p:nvSpPr>
+        <p:spPr>
+          <a:xfrm>
+            <a:off x="685800" y="4343400"/>
+            <a:ext cx="5486400" cy="4114800"/>
+          </a:xfrm>
+          <a:prstGeom prst="rect">
+            <a:avLst/>
+          </a:prstGeom>
+        </p:spPr>
+        <p:txBody>
+          <a:bodyPr spcFirstLastPara="1" wrap="square" lIns="91425" tIns="91425" rIns="91425" bIns="91425" anchor="t" anchorCtr="0">
+            <a:noAutofit/>
+          </a:bodyPr>
+          <a:lstStyle/>
+          <a:p>
+            <a:pPr marL="0" lvl="0" indent="0" algn="l" rtl="0">
+              <a:spcBef>
+                <a:spcPts val="0"/>
+              </a:spcBef>
+              <a:spcAft>
+                <a:spcPts val="0"/>
+              </a:spcAft>
+              <a:buNone/>
+            </a:pPr>
+            <a:endParaRPr/>
+          </a:p>
+        </p:txBody>
+      </p:sp>
+    </p:spTree>
+    <p:extLst>
+      <p:ext uri="{BB962C8B-B14F-4D97-AF65-F5344CB8AC3E}">
         <p14:creationId xmlns:p14="http://schemas.microsoft.com/office/powerpoint/2010/main" val="217046788"/>
       </p:ext>
     </p:extLst>
@@ -1351,7 +1461,7 @@
 </p:notes>
 </file>
 
-<file path=ppt/notesSlides/notesSlide7.xml><?xml version="1.0" encoding="utf-8"?>
+<file path=ppt/notesSlides/notesSlide8.xml><?xml version="1.0" encoding="utf-8"?>
 <p:notes xmlns:a="http://schemas.openxmlformats.org/drawingml/2006/main" xmlns:r="http://schemas.openxmlformats.org/officeDocument/2006/relationships" xmlns:p="http://schemas.openxmlformats.org/presentationml/2006/main" showMasterSp="0" showMasterPhAnim="0">
   <p:cSld>
     <p:spTree>
@@ -6264,7 +6374,7 @@
               <a:rPr lang="en" dirty="0">
                 <a:latin typeface="Bahnschrift" panose="020B0502040204020203" pitchFamily="34" charset="0"/>
               </a:rPr>
-              <a:t>Modelo de Análisis de Reviews</a:t>
+              <a:t>Modelo de Análisis de Reseñas</a:t>
             </a:r>
             <a:endParaRPr dirty="0">
               <a:latin typeface="Bahnschrift" panose="020B0502040204020203" pitchFamily="34" charset="0"/>
@@ -6393,55 +6503,82 @@
           <a:lstStyle/>
           <a:p>
             <a:r>
-              <a:rPr lang="es-ES" dirty="0">
+              <a:rPr lang="es-ES" b="1" dirty="0">
                 <a:latin typeface="Bahnschrift" panose="020B0502040204020203" pitchFamily="34" charset="0"/>
               </a:rPr>
-              <a:t>Empresa de </a:t>
+              <a:t>Sector: </a:t>
             </a:r>
             <a:r>
-              <a:rPr lang="es-ES" dirty="0" err="1">
+              <a:rPr lang="es-ES" i="1" dirty="0">
                 <a:latin typeface="Bahnschrift" panose="020B0502040204020203" pitchFamily="34" charset="0"/>
               </a:rPr>
-              <a:t>Retail</a:t>
+              <a:t>Electrónica y </a:t>
             </a:r>
-            <a:endParaRPr lang="es-ES" dirty="0">
+            <a:r>
+              <a:rPr lang="es-ES" i="1" dirty="0" err="1">
+                <a:latin typeface="Bahnschrift" panose="020B0502040204020203" pitchFamily="34" charset="0"/>
+              </a:rPr>
+              <a:t>Tecnologia</a:t>
+            </a:r>
+            <a:endParaRPr lang="es-ES" i="1" dirty="0">
               <a:latin typeface="Bahnschrift" panose="020B0502040204020203" pitchFamily="34" charset="0"/>
             </a:endParaRPr>
           </a:p>
           <a:p>
-            <a:pPr marL="285750" indent="-285750">
-              <a:buFontTx/>
-              <a:buChar char="-"/>
-            </a:pPr>
             <a:r>
               <a:rPr lang="es-ES" dirty="0">
                 <a:latin typeface="Bahnschrift" panose="020B0502040204020203" pitchFamily="34" charset="0"/>
               </a:rPr>
-              <a:t>Reino Unido</a:t>
+              <a:t>- </a:t>
+            </a:r>
+            <a:r>
+              <a:rPr lang="es-ES" dirty="0">
+                <a:solidFill>
+                  <a:schemeClr val="tx1">
+                    <a:lumMod val="50000"/>
+                    <a:lumOff val="50000"/>
+                  </a:schemeClr>
+                </a:solidFill>
+                <a:latin typeface="Bahnschrift" panose="020B0502040204020203" pitchFamily="34" charset="0"/>
+              </a:rPr>
+              <a:t>69 Empresas y 5596 Reseñas</a:t>
             </a:r>
           </a:p>
           <a:p>
-            <a:pPr marL="285750" indent="-285750">
-              <a:buFontTx/>
-              <a:buChar char="-"/>
-            </a:pPr>
+            <a:r>
+              <a:rPr lang="es-ES" b="1" dirty="0">
+                <a:latin typeface="Bahnschrift" panose="020B0502040204020203" pitchFamily="34" charset="0"/>
+              </a:rPr>
+              <a:t>Empresa: </a:t>
+            </a:r>
+            <a:r>
+              <a:rPr lang="es-ES" i="1" dirty="0" err="1">
+                <a:latin typeface="Bahnschrift" panose="020B0502040204020203" pitchFamily="34" charset="0"/>
+              </a:rPr>
+              <a:t>ElectricalWorld</a:t>
+            </a:r>
+            <a:endParaRPr lang="es-ES" i="1" dirty="0">
+              <a:latin typeface="Bahnschrift" panose="020B0502040204020203" pitchFamily="34" charset="0"/>
+            </a:endParaRPr>
+          </a:p>
+          <a:p>
             <a:r>
               <a:rPr lang="es-ES" dirty="0">
                 <a:latin typeface="Bahnschrift" panose="020B0502040204020203" pitchFamily="34" charset="0"/>
               </a:rPr>
-              <a:t>5490 clientes</a:t>
+              <a:t>- </a:t>
             </a:r>
-          </a:p>
-          <a:p>
-            <a:pPr marL="285750" indent="-285750">
-              <a:buFontTx/>
-              <a:buChar char="-"/>
-            </a:pPr>
             <a:r>
               <a:rPr lang="es-ES" dirty="0">
+                <a:solidFill>
+                  <a:schemeClr val="tx1">
+                    <a:lumMod val="50000"/>
+                    <a:lumOff val="50000"/>
+                  </a:schemeClr>
+                </a:solidFill>
                 <a:latin typeface="Bahnschrift" panose="020B0502040204020203" pitchFamily="34" charset="0"/>
               </a:rPr>
-              <a:t>1067371 pedidos (2010 – 2011) </a:t>
+              <a:t>100 Reseñas</a:t>
             </a:r>
           </a:p>
         </p:txBody>
@@ -6460,7 +6597,7 @@
         </p:nvSpPr>
         <p:spPr>
           <a:xfrm>
-            <a:off x="4071098" y="1176617"/>
+            <a:off x="311700" y="2454090"/>
             <a:ext cx="4114800" cy="450477"/>
           </a:xfrm>
           <a:prstGeom prst="rect">
@@ -6490,8 +6627,17 @@
               <a:rPr lang="es-ES" dirty="0">
                 <a:latin typeface="Bahnschrift" panose="020B0502040204020203" pitchFamily="34" charset="0"/>
               </a:rPr>
-              <a:t>Mapa de Densidad de Clientes</a:t>
+              <a:t>Descripción </a:t>
             </a:r>
+            <a:r>
+              <a:rPr lang="es-ES" dirty="0" err="1">
+                <a:latin typeface="Bahnschrift" panose="020B0502040204020203" pitchFamily="34" charset="0"/>
+              </a:rPr>
+              <a:t>ElectricalWorld</a:t>
+            </a:r>
+            <a:endParaRPr lang="es-ES" dirty="0">
+              <a:latin typeface="Bahnschrift" panose="020B0502040204020203" pitchFamily="34" charset="0"/>
+            </a:endParaRPr>
           </a:p>
         </p:txBody>
       </p:sp>
@@ -6511,8 +6657,8 @@
         </p:nvSpPr>
         <p:spPr>
           <a:xfrm>
-            <a:off x="311700" y="2524685"/>
-            <a:ext cx="2828188" cy="572700"/>
+            <a:off x="5015275" y="1135075"/>
+            <a:ext cx="3437559" cy="572700"/>
           </a:xfrm>
           <a:prstGeom prst="rect">
             <a:avLst/>
@@ -6794,7 +6940,7 @@
                 </a:solidFill>
                 <a:latin typeface="Bahnschrift" panose="020B0502040204020203" pitchFamily="34" charset="0"/>
               </a:rPr>
-              <a:t>Objetivo</a:t>
+              <a:t>Objetivos</a:t>
             </a:r>
           </a:p>
         </p:txBody>
@@ -6813,8 +6959,8 @@
         </p:nvSpPr>
         <p:spPr>
           <a:xfrm>
-            <a:off x="311701" y="3477266"/>
-            <a:ext cx="3292112" cy="1284194"/>
+            <a:off x="5015275" y="2162936"/>
+            <a:ext cx="3706103" cy="1904920"/>
           </a:xfrm>
           <a:prstGeom prst="rect">
             <a:avLst/>
@@ -6838,45 +6984,37 @@
           <a:bodyPr rtlCol="0" anchor="ctr"/>
           <a:lstStyle/>
           <a:p>
-            <a:pPr algn="ctr"/>
+            <a:pPr marL="285750" indent="-285750" algn="ctr">
+              <a:buFontTx/>
+              <a:buChar char="-"/>
+            </a:pPr>
             <a:r>
               <a:rPr lang="es-ES" b="1" dirty="0">
                 <a:latin typeface="Bahnschrift" panose="020B0502040204020203" pitchFamily="34" charset="0"/>
               </a:rPr>
-              <a:t>¿Qué clientes tienen mayor probabilidad de recompra?</a:t>
+              <a:t>¿Qué opinión tienen los clientes de nuestros servicios/productos?</a:t>
+            </a:r>
+          </a:p>
+          <a:p>
+            <a:pPr algn="ctr"/>
+            <a:endParaRPr lang="es-ES" b="1" dirty="0">
+              <a:latin typeface="Bahnschrift" panose="020B0502040204020203" pitchFamily="34" charset="0"/>
+            </a:endParaRPr>
+          </a:p>
+          <a:p>
+            <a:pPr marL="285750" indent="-285750" algn="ctr">
+              <a:buFontTx/>
+              <a:buChar char="-"/>
+            </a:pPr>
+            <a:r>
+              <a:rPr lang="es-ES" b="1" dirty="0">
+                <a:latin typeface="Bahnschrift" panose="020B0502040204020203" pitchFamily="34" charset="0"/>
+              </a:rPr>
+              <a:t>¿Cuál es nuestro posicionamiento en el mercado?</a:t>
             </a:r>
           </a:p>
         </p:txBody>
       </p:sp>
-      <p:pic>
-        <p:nvPicPr>
-          <p:cNvPr id="11" name="Imagen 10">
-            <a:extLst>
-              <a:ext uri="{FF2B5EF4-FFF2-40B4-BE49-F238E27FC236}">
-                <a16:creationId xmlns:a16="http://schemas.microsoft.com/office/drawing/2014/main" id="{B8BCD507-D609-4568-9304-E520812FCAD7}"/>
-              </a:ext>
-            </a:extLst>
-          </p:cNvPr>
-          <p:cNvPicPr>
-            <a:picLocks noChangeAspect="1"/>
-          </p:cNvPicPr>
-          <p:nvPr/>
-        </p:nvPicPr>
-        <p:blipFill rotWithShape="1">
-          <a:blip r:embed="rId3"/>
-          <a:srcRect r="1607"/>
-          <a:stretch/>
-        </p:blipFill>
-        <p:spPr>
-          <a:xfrm>
-            <a:off x="3330615" y="1788355"/>
-            <a:ext cx="5595765" cy="2819766"/>
-          </a:xfrm>
-          <a:prstGeom prst="rect">
-            <a:avLst/>
-          </a:prstGeom>
-        </p:spPr>
-      </p:pic>
       <p:sp>
         <p:nvSpPr>
           <p:cNvPr id="13" name="CuadroTexto 12">
@@ -6891,8 +7029,8 @@
         </p:nvSpPr>
         <p:spPr>
           <a:xfrm>
-            <a:off x="217620" y="3121526"/>
-            <a:ext cx="1667435" cy="523220"/>
+            <a:off x="4944246" y="1763742"/>
+            <a:ext cx="2026706" cy="523220"/>
           </a:xfrm>
           <a:prstGeom prst="rect">
             <a:avLst/>
@@ -6914,6 +7052,72 @@
           </a:p>
           <a:p>
             <a:endParaRPr lang="es-ES" dirty="0"/>
+          </a:p>
+        </p:txBody>
+      </p:sp>
+      <p:sp>
+        <p:nvSpPr>
+          <p:cNvPr id="2" name="CuadroTexto 1">
+            <a:extLst>
+              <a:ext uri="{FF2B5EF4-FFF2-40B4-BE49-F238E27FC236}">
+                <a16:creationId xmlns:a16="http://schemas.microsoft.com/office/drawing/2014/main" id="{A11CD5DB-C9F0-4C65-AE08-222F40E6278C}"/>
+              </a:ext>
+            </a:extLst>
+          </p:cNvPr>
+          <p:cNvSpPr txBox="1"/>
+          <p:nvPr/>
+        </p:nvSpPr>
+        <p:spPr>
+          <a:xfrm>
+            <a:off x="256463" y="3072922"/>
+            <a:ext cx="4443128" cy="1600438"/>
+          </a:xfrm>
+          <a:prstGeom prst="rect">
+            <a:avLst/>
+          </a:prstGeom>
+          <a:noFill/>
+        </p:spPr>
+        <p:txBody>
+          <a:bodyPr wrap="square" rtlCol="0">
+            <a:spAutoFit/>
+          </a:bodyPr>
+          <a:lstStyle/>
+          <a:p>
+            <a:pPr algn="just"/>
+            <a:r>
+              <a:rPr lang="en-US" b="0" i="0" dirty="0">
+                <a:solidFill>
+                  <a:schemeClr val="tx1">
+                    <a:lumMod val="50000"/>
+                    <a:lumOff val="50000"/>
+                  </a:schemeClr>
+                </a:solidFill>
+                <a:effectLst/>
+                <a:latin typeface="Consolas" panose="020B0609020204030204" pitchFamily="49" charset="0"/>
+              </a:rPr>
+              <a:t>Electrical World was founded by Managing Director John at the age of 20, when he launched his first electrical contract company. </a:t>
+            </a:r>
+            <a:r>
+              <a:rPr lang="en-US" b="1" i="0" dirty="0">
+                <a:solidFill>
+                  <a:schemeClr val="tx1">
+                    <a:lumMod val="50000"/>
+                    <a:lumOff val="50000"/>
+                  </a:schemeClr>
+                </a:solidFill>
+                <a:effectLst/>
+                <a:latin typeface="Consolas" panose="020B0609020204030204" pitchFamily="49" charset="0"/>
+              </a:rPr>
+              <a:t>We now offer worldwide delivery and have a vast range of DIY and B2B products available at extremely competitive prices!</a:t>
+            </a:r>
+            <a:endParaRPr lang="es-ES" b="1" dirty="0">
+              <a:solidFill>
+                <a:schemeClr val="tx1">
+                  <a:lumMod val="50000"/>
+                  <a:lumOff val="50000"/>
+                </a:schemeClr>
+              </a:solidFill>
+            </a:endParaRPr>
           </a:p>
         </p:txBody>
       </p:sp>
@@ -6993,17 +7197,17 @@
                 </a:solidFill>
                 <a:latin typeface="Bahnschrift" panose="020B0502040204020203" pitchFamily="34" charset="0"/>
               </a:rPr>
-              <a:t>Mercado</a:t>
+              <a:t>Top Compañías del Mercado</a:t>
             </a:r>
           </a:p>
         </p:txBody>
       </p:sp>
       <p:pic>
         <p:nvPicPr>
-          <p:cNvPr id="10" name="Imagen 9">
+          <p:cNvPr id="3" name="Imagen 2">
             <a:extLst>
               <a:ext uri="{FF2B5EF4-FFF2-40B4-BE49-F238E27FC236}">
-                <a16:creationId xmlns:a16="http://schemas.microsoft.com/office/drawing/2014/main" id="{83CB9C80-5DF5-46E8-A4BC-C493C434E3FB}"/>
+                <a16:creationId xmlns:a16="http://schemas.microsoft.com/office/drawing/2014/main" id="{8563806A-AEC9-4310-9EE9-5F51D673FBD1}"/>
               </a:ext>
             </a:extLst>
           </p:cNvPr>
@@ -7020,141 +7224,14 @@
         </p:blipFill>
         <p:spPr>
           <a:xfrm>
-            <a:off x="311700" y="1772670"/>
-            <a:ext cx="2247372" cy="2314075"/>
+            <a:off x="327174" y="1483018"/>
+            <a:ext cx="8505126" cy="2973721"/>
           </a:xfrm>
           <a:prstGeom prst="rect">
             <a:avLst/>
           </a:prstGeom>
         </p:spPr>
       </p:pic>
-      <p:pic>
-        <p:nvPicPr>
-          <p:cNvPr id="14" name="Imagen 13">
-            <a:extLst>
-              <a:ext uri="{FF2B5EF4-FFF2-40B4-BE49-F238E27FC236}">
-                <a16:creationId xmlns:a16="http://schemas.microsoft.com/office/drawing/2014/main" id="{386E414A-93C1-48C6-B396-57805368D890}"/>
-              </a:ext>
-            </a:extLst>
-          </p:cNvPr>
-          <p:cNvPicPr>
-            <a:picLocks noChangeAspect="1"/>
-          </p:cNvPicPr>
-          <p:nvPr/>
-        </p:nvPicPr>
-        <p:blipFill rotWithShape="1">
-          <a:blip r:embed="rId4"/>
-          <a:srcRect/>
-          <a:stretch/>
-        </p:blipFill>
-        <p:spPr>
-          <a:xfrm>
-            <a:off x="2844053" y="1832893"/>
-            <a:ext cx="5988247" cy="2193627"/>
-          </a:xfrm>
-          <a:prstGeom prst="rect">
-            <a:avLst/>
-          </a:prstGeom>
-        </p:spPr>
-      </p:pic>
-      <p:sp>
-        <p:nvSpPr>
-          <p:cNvPr id="15" name="Rectángulo 14">
-            <a:extLst>
-              <a:ext uri="{FF2B5EF4-FFF2-40B4-BE49-F238E27FC236}">
-                <a16:creationId xmlns:a16="http://schemas.microsoft.com/office/drawing/2014/main" id="{DEFEDF08-BF5C-42A6-8594-875E6AEE762D}"/>
-              </a:ext>
-            </a:extLst>
-          </p:cNvPr>
-          <p:cNvSpPr/>
-          <p:nvPr/>
-        </p:nvSpPr>
-        <p:spPr>
-          <a:xfrm>
-            <a:off x="433505" y="1465729"/>
-            <a:ext cx="2003762" cy="451273"/>
-          </a:xfrm>
-          <a:prstGeom prst="rect">
-            <a:avLst/>
-          </a:prstGeom>
-        </p:spPr>
-        <p:style>
-          <a:lnRef idx="2">
-            <a:schemeClr val="dk1"/>
-          </a:lnRef>
-          <a:fillRef idx="1">
-            <a:schemeClr val="lt1"/>
-          </a:fillRef>
-          <a:effectRef idx="0">
-            <a:schemeClr val="dk1"/>
-          </a:effectRef>
-          <a:fontRef idx="minor">
-            <a:schemeClr val="dk1"/>
-          </a:fontRef>
-        </p:style>
-        <p:txBody>
-          <a:bodyPr rtlCol="0" anchor="ctr"/>
-          <a:lstStyle/>
-          <a:p>
-            <a:pPr algn="ctr"/>
-            <a:r>
-              <a:rPr lang="es-ES" dirty="0">
-                <a:latin typeface="Bahnschrift" panose="020B0502040204020203" pitchFamily="34" charset="0"/>
-              </a:rPr>
-              <a:t>Contribución de Ventas por País</a:t>
-            </a:r>
-          </a:p>
-        </p:txBody>
-      </p:sp>
-      <p:sp>
-        <p:nvSpPr>
-          <p:cNvPr id="16" name="Rectángulo 15">
-            <a:extLst>
-              <a:ext uri="{FF2B5EF4-FFF2-40B4-BE49-F238E27FC236}">
-                <a16:creationId xmlns:a16="http://schemas.microsoft.com/office/drawing/2014/main" id="{1F876637-B65F-453A-927A-D03373E1D89B}"/>
-              </a:ext>
-            </a:extLst>
-          </p:cNvPr>
-          <p:cNvSpPr/>
-          <p:nvPr/>
-        </p:nvSpPr>
-        <p:spPr>
-          <a:xfrm>
-            <a:off x="4095586" y="1446433"/>
-            <a:ext cx="2903607" cy="512702"/>
-          </a:xfrm>
-          <a:prstGeom prst="rect">
-            <a:avLst/>
-          </a:prstGeom>
-        </p:spPr>
-        <p:style>
-          <a:lnRef idx="2">
-            <a:schemeClr val="dk1"/>
-          </a:lnRef>
-          <a:fillRef idx="1">
-            <a:schemeClr val="lt1"/>
-          </a:fillRef>
-          <a:effectRef idx="0">
-            <a:schemeClr val="dk1"/>
-          </a:effectRef>
-          <a:fontRef idx="minor">
-            <a:schemeClr val="dk1"/>
-          </a:fontRef>
-        </p:style>
-        <p:txBody>
-          <a:bodyPr rtlCol="0" anchor="ctr"/>
-          <a:lstStyle/>
-          <a:p>
-            <a:pPr algn="ctr"/>
-            <a:r>
-              <a:rPr lang="es-ES" dirty="0">
-                <a:latin typeface="Bahnschrift" panose="020B0502040204020203" pitchFamily="34" charset="0"/>
-              </a:rPr>
-              <a:t>Ventas sobre el Tiempo por País</a:t>
-            </a:r>
-          </a:p>
-        </p:txBody>
-      </p:sp>
     </p:spTree>
     <p:extLst>
       <p:ext uri="{BB962C8B-B14F-4D97-AF65-F5344CB8AC3E}">
@@ -7236,924 +7313,45 @@
                 </a:solidFill>
                 <a:latin typeface="Bahnschrift" panose="020B0502040204020203" pitchFamily="34" charset="0"/>
               </a:rPr>
-              <a:t>Nuestra Empresa vs Mercado</a:t>
+              <a:t>Características de las Reseñas del Mercado</a:t>
             </a:r>
           </a:p>
         </p:txBody>
       </p:sp>
-      <p:sp>
-        <p:nvSpPr>
-          <p:cNvPr id="15" name="Rectángulo 14">
+      <p:pic>
+        <p:nvPicPr>
+          <p:cNvPr id="6" name="Imagen 5">
             <a:extLst>
               <a:ext uri="{FF2B5EF4-FFF2-40B4-BE49-F238E27FC236}">
-                <a16:creationId xmlns:a16="http://schemas.microsoft.com/office/drawing/2014/main" id="{0F8CF133-8859-40EA-B640-6D12F155171B}"/>
+                <a16:creationId xmlns:a16="http://schemas.microsoft.com/office/drawing/2014/main" id="{23F80079-112A-4A6E-A796-D647493F9CE0}"/>
               </a:ext>
             </a:extLst>
           </p:cNvPr>
-          <p:cNvSpPr/>
+          <p:cNvPicPr>
+            <a:picLocks noChangeAspect="1"/>
+          </p:cNvPicPr>
           <p:nvPr/>
-        </p:nvSpPr>
+        </p:nvPicPr>
+        <p:blipFill>
+          <a:blip r:embed="rId3"/>
+          <a:stretch>
+            <a:fillRect/>
+          </a:stretch>
+        </p:blipFill>
         <p:spPr>
           <a:xfrm>
-            <a:off x="678927" y="2112511"/>
-            <a:ext cx="1467335" cy="382715"/>
+            <a:off x="220444" y="1491806"/>
+            <a:ext cx="8611856" cy="3011038"/>
           </a:xfrm>
           <a:prstGeom prst="rect">
             <a:avLst/>
           </a:prstGeom>
         </p:spPr>
-        <p:style>
-          <a:lnRef idx="2">
-            <a:schemeClr val="dk1"/>
-          </a:lnRef>
-          <a:fillRef idx="1">
-            <a:schemeClr val="lt1"/>
-          </a:fillRef>
-          <a:effectRef idx="0">
-            <a:schemeClr val="dk1"/>
-          </a:effectRef>
-          <a:fontRef idx="minor">
-            <a:schemeClr val="dk1"/>
-          </a:fontRef>
-        </p:style>
-        <p:txBody>
-          <a:bodyPr rtlCol="0" anchor="ctr"/>
-          <a:lstStyle/>
-          <a:p>
-            <a:pPr algn="ctr"/>
-            <a:r>
-              <a:rPr lang="es-ES" dirty="0" err="1"/>
-              <a:t>Recency</a:t>
-            </a:r>
-            <a:r>
-              <a:rPr lang="es-ES" dirty="0"/>
-              <a:t> (</a:t>
-            </a:r>
-            <a:r>
-              <a:rPr lang="es-ES" dirty="0" err="1"/>
-              <a:t>days</a:t>
-            </a:r>
-            <a:r>
-              <a:rPr lang="es-ES" dirty="0"/>
-              <a:t>)</a:t>
-            </a:r>
-          </a:p>
-        </p:txBody>
-      </p:sp>
-      <p:sp>
-        <p:nvSpPr>
-          <p:cNvPr id="16" name="Rectángulo 15">
-            <a:extLst>
-              <a:ext uri="{FF2B5EF4-FFF2-40B4-BE49-F238E27FC236}">
-                <a16:creationId xmlns:a16="http://schemas.microsoft.com/office/drawing/2014/main" id="{1B696F93-069D-4004-91B0-EF6296BBEB9A}"/>
-              </a:ext>
-            </a:extLst>
-          </p:cNvPr>
-          <p:cNvSpPr/>
-          <p:nvPr/>
-        </p:nvSpPr>
-        <p:spPr>
-          <a:xfrm>
-            <a:off x="2865531" y="2105687"/>
-            <a:ext cx="1312074" cy="382715"/>
-          </a:xfrm>
-          <a:prstGeom prst="rect">
-            <a:avLst/>
-          </a:prstGeom>
-        </p:spPr>
-        <p:style>
-          <a:lnRef idx="2">
-            <a:schemeClr val="dk1"/>
-          </a:lnRef>
-          <a:fillRef idx="1">
-            <a:schemeClr val="lt1"/>
-          </a:fillRef>
-          <a:effectRef idx="0">
-            <a:schemeClr val="dk1"/>
-          </a:effectRef>
-          <a:fontRef idx="minor">
-            <a:schemeClr val="dk1"/>
-          </a:fontRef>
-        </p:style>
-        <p:txBody>
-          <a:bodyPr rtlCol="0" anchor="ctr"/>
-          <a:lstStyle/>
-          <a:p>
-            <a:pPr algn="ctr"/>
-            <a:r>
-              <a:rPr lang="es-ES" dirty="0" err="1"/>
-              <a:t>Frequency</a:t>
-            </a:r>
-            <a:endParaRPr lang="es-ES" dirty="0"/>
-          </a:p>
-        </p:txBody>
-      </p:sp>
-      <p:sp>
-        <p:nvSpPr>
-          <p:cNvPr id="17" name="Rectángulo 16">
-            <a:extLst>
-              <a:ext uri="{FF2B5EF4-FFF2-40B4-BE49-F238E27FC236}">
-                <a16:creationId xmlns:a16="http://schemas.microsoft.com/office/drawing/2014/main" id="{8D841EAB-AA06-4DBF-9D2F-680A8D202AC8}"/>
-              </a:ext>
-            </a:extLst>
-          </p:cNvPr>
-          <p:cNvSpPr/>
-          <p:nvPr/>
-        </p:nvSpPr>
-        <p:spPr>
-          <a:xfrm>
-            <a:off x="7167282" y="2119234"/>
-            <a:ext cx="1556496" cy="382715"/>
-          </a:xfrm>
-          <a:prstGeom prst="rect">
-            <a:avLst/>
-          </a:prstGeom>
-        </p:spPr>
-        <p:style>
-          <a:lnRef idx="2">
-            <a:schemeClr val="dk1"/>
-          </a:lnRef>
-          <a:fillRef idx="1">
-            <a:schemeClr val="lt1"/>
-          </a:fillRef>
-          <a:effectRef idx="0">
-            <a:schemeClr val="dk1"/>
-          </a:effectRef>
-          <a:fontRef idx="minor">
-            <a:schemeClr val="dk1"/>
-          </a:fontRef>
-        </p:style>
-        <p:txBody>
-          <a:bodyPr rtlCol="0" anchor="ctr"/>
-          <a:lstStyle/>
-          <a:p>
-            <a:pPr algn="ctr"/>
-            <a:r>
-              <a:rPr lang="es-ES" dirty="0" err="1"/>
-              <a:t>Customer</a:t>
-            </a:r>
-            <a:r>
-              <a:rPr lang="es-ES" dirty="0"/>
-              <a:t> </a:t>
-            </a:r>
-            <a:r>
-              <a:rPr lang="es-ES" dirty="0" err="1"/>
-              <a:t>Lifetime</a:t>
-            </a:r>
-            <a:r>
-              <a:rPr lang="es-ES" dirty="0"/>
-              <a:t> (</a:t>
-            </a:r>
-            <a:r>
-              <a:rPr lang="es-ES" dirty="0" err="1"/>
-              <a:t>days</a:t>
-            </a:r>
-            <a:r>
-              <a:rPr lang="es-ES" dirty="0"/>
-              <a:t>)</a:t>
-            </a:r>
-          </a:p>
-        </p:txBody>
-      </p:sp>
-      <p:grpSp>
-        <p:nvGrpSpPr>
-          <p:cNvPr id="42" name="Grupo 41">
-            <a:extLst>
-              <a:ext uri="{FF2B5EF4-FFF2-40B4-BE49-F238E27FC236}">
-                <a16:creationId xmlns:a16="http://schemas.microsoft.com/office/drawing/2014/main" id="{CC6370CA-DA92-4334-9128-FEFC738EC0D7}"/>
-              </a:ext>
-            </a:extLst>
-          </p:cNvPr>
-          <p:cNvGrpSpPr/>
-          <p:nvPr/>
-        </p:nvGrpSpPr>
-        <p:grpSpPr>
-          <a:xfrm>
-            <a:off x="6067974" y="1190887"/>
-            <a:ext cx="2653473" cy="838274"/>
-            <a:chOff x="1190065" y="1066098"/>
-            <a:chExt cx="2653473" cy="838274"/>
-          </a:xfrm>
-        </p:grpSpPr>
-        <p:pic>
-          <p:nvPicPr>
-            <p:cNvPr id="18" name="Imagen 17">
-              <a:extLst>
-                <a:ext uri="{FF2B5EF4-FFF2-40B4-BE49-F238E27FC236}">
-                  <a16:creationId xmlns:a16="http://schemas.microsoft.com/office/drawing/2014/main" id="{63FEE0DE-8E7D-401D-9EB6-B42037C049AB}"/>
-                </a:ext>
-              </a:extLst>
-            </p:cNvPr>
-            <p:cNvPicPr>
-              <a:picLocks noChangeAspect="1"/>
-            </p:cNvPicPr>
-            <p:nvPr/>
-          </p:nvPicPr>
-          <p:blipFill>
-            <a:blip r:embed="rId3"/>
-            <a:stretch>
-              <a:fillRect/>
-            </a:stretch>
-          </p:blipFill>
-          <p:spPr>
-            <a:xfrm>
-              <a:off x="1190065" y="1066098"/>
-              <a:ext cx="634875" cy="601460"/>
-            </a:xfrm>
-            <a:prstGeom prst="rect">
-              <a:avLst/>
-            </a:prstGeom>
-          </p:spPr>
-        </p:pic>
-        <p:sp>
-          <p:nvSpPr>
-            <p:cNvPr id="19" name="CuadroTexto 18">
-              <a:extLst>
-                <a:ext uri="{FF2B5EF4-FFF2-40B4-BE49-F238E27FC236}">
-                  <a16:creationId xmlns:a16="http://schemas.microsoft.com/office/drawing/2014/main" id="{1CDF45A4-EDE4-4D35-8C53-AF4E40544FDD}"/>
-                </a:ext>
-              </a:extLst>
-            </p:cNvPr>
-            <p:cNvSpPr txBox="1"/>
-            <p:nvPr/>
-          </p:nvSpPr>
-          <p:spPr>
-            <a:xfrm>
-              <a:off x="1470132" y="1258041"/>
-              <a:ext cx="2373406" cy="646331"/>
-            </a:xfrm>
-            <a:prstGeom prst="rect">
-              <a:avLst/>
-            </a:prstGeom>
-            <a:solidFill>
-              <a:schemeClr val="bg1"/>
-            </a:solidFill>
-          </p:spPr>
-          <p:txBody>
-            <a:bodyPr wrap="square" rtlCol="0">
-              <a:spAutoFit/>
-            </a:bodyPr>
-            <a:lstStyle/>
-            <a:p>
-              <a:r>
-                <a:rPr lang="es-ES" sz="1100" dirty="0">
-                  <a:latin typeface="Bahnschrift" panose="020B0502040204020203" pitchFamily="34" charset="0"/>
-                </a:rPr>
-                <a:t>Clientes SIN recompras</a:t>
-              </a:r>
-            </a:p>
-            <a:p>
-              <a:r>
-                <a:rPr lang="es-ES" sz="1100" dirty="0">
-                  <a:latin typeface="Bahnschrift" panose="020B0502040204020203" pitchFamily="34" charset="0"/>
-                </a:rPr>
-                <a:t>Clientes CON recompras</a:t>
-              </a:r>
-            </a:p>
-            <a:p>
-              <a:endParaRPr lang="es-ES" dirty="0"/>
-            </a:p>
-          </p:txBody>
-        </p:sp>
-      </p:grpSp>
-      <p:sp>
-        <p:nvSpPr>
-          <p:cNvPr id="23" name="Rectángulo 22">
-            <a:extLst>
-              <a:ext uri="{FF2B5EF4-FFF2-40B4-BE49-F238E27FC236}">
-                <a16:creationId xmlns:a16="http://schemas.microsoft.com/office/drawing/2014/main" id="{14C0B937-B1AD-4D83-9753-41A9EF15E8C8}"/>
-              </a:ext>
-            </a:extLst>
-          </p:cNvPr>
-          <p:cNvSpPr/>
-          <p:nvPr/>
-        </p:nvSpPr>
-        <p:spPr>
-          <a:xfrm>
-            <a:off x="5135940" y="2112511"/>
-            <a:ext cx="1312074" cy="382715"/>
-          </a:xfrm>
-          <a:prstGeom prst="rect">
-            <a:avLst/>
-          </a:prstGeom>
-        </p:spPr>
-        <p:style>
-          <a:lnRef idx="2">
-            <a:schemeClr val="dk1"/>
-          </a:lnRef>
-          <a:fillRef idx="1">
-            <a:schemeClr val="lt1"/>
-          </a:fillRef>
-          <a:effectRef idx="0">
-            <a:schemeClr val="dk1"/>
-          </a:effectRef>
-          <a:fontRef idx="minor">
-            <a:schemeClr val="dk1"/>
-          </a:fontRef>
-        </p:style>
-        <p:txBody>
-          <a:bodyPr rtlCol="0" anchor="ctr"/>
-          <a:lstStyle/>
-          <a:p>
-            <a:pPr algn="ctr"/>
-            <a:r>
-              <a:rPr lang="es-ES" dirty="0" err="1"/>
-              <a:t>Monetary</a:t>
-            </a:r>
-            <a:endParaRPr lang="es-ES" dirty="0"/>
-          </a:p>
-        </p:txBody>
-      </p:sp>
-      <p:grpSp>
-        <p:nvGrpSpPr>
-          <p:cNvPr id="37" name="Grupo 36">
-            <a:extLst>
-              <a:ext uri="{FF2B5EF4-FFF2-40B4-BE49-F238E27FC236}">
-                <a16:creationId xmlns:a16="http://schemas.microsoft.com/office/drawing/2014/main" id="{015063C6-6EE1-4511-8271-54843FED1CD2}"/>
-              </a:ext>
-            </a:extLst>
-          </p:cNvPr>
-          <p:cNvGrpSpPr/>
-          <p:nvPr/>
-        </p:nvGrpSpPr>
-        <p:grpSpPr>
-          <a:xfrm>
-            <a:off x="311700" y="2703366"/>
-            <a:ext cx="1866272" cy="1993959"/>
-            <a:chOff x="311700" y="2703366"/>
-            <a:chExt cx="1866272" cy="1993959"/>
-          </a:xfrm>
-        </p:grpSpPr>
-        <p:pic>
-          <p:nvPicPr>
-            <p:cNvPr id="3" name="Imagen 2">
-              <a:extLst>
-                <a:ext uri="{FF2B5EF4-FFF2-40B4-BE49-F238E27FC236}">
-                  <a16:creationId xmlns:a16="http://schemas.microsoft.com/office/drawing/2014/main" id="{E757D0C7-558C-4FE8-AF5E-83EA898EC23E}"/>
-                </a:ext>
-              </a:extLst>
-            </p:cNvPr>
-            <p:cNvPicPr>
-              <a:picLocks noChangeAspect="1"/>
-            </p:cNvPicPr>
-            <p:nvPr/>
-          </p:nvPicPr>
-          <p:blipFill rotWithShape="1">
-            <a:blip r:embed="rId4"/>
-            <a:srcRect/>
-            <a:stretch/>
-          </p:blipFill>
-          <p:spPr>
-            <a:xfrm>
-              <a:off x="311700" y="2703366"/>
-              <a:ext cx="1866272" cy="1659791"/>
-            </a:xfrm>
-            <a:prstGeom prst="rect">
-              <a:avLst/>
-            </a:prstGeom>
-          </p:spPr>
-        </p:pic>
-        <p:pic>
-          <p:nvPicPr>
-            <p:cNvPr id="33" name="Imagen 32">
-              <a:extLst>
-                <a:ext uri="{FF2B5EF4-FFF2-40B4-BE49-F238E27FC236}">
-                  <a16:creationId xmlns:a16="http://schemas.microsoft.com/office/drawing/2014/main" id="{A8341AA5-58A8-408C-849B-7B9CC4962017}"/>
-                </a:ext>
-              </a:extLst>
-            </p:cNvPr>
-            <p:cNvPicPr>
-              <a:picLocks noChangeAspect="1"/>
-            </p:cNvPicPr>
-            <p:nvPr/>
-          </p:nvPicPr>
-          <p:blipFill rotWithShape="1">
-            <a:blip r:embed="rId5"/>
-            <a:srcRect l="-1" r="80174"/>
-            <a:stretch/>
-          </p:blipFill>
-          <p:spPr>
-            <a:xfrm>
-              <a:off x="570951" y="4316108"/>
-              <a:ext cx="1602945" cy="381217"/>
-            </a:xfrm>
-            <a:prstGeom prst="rect">
-              <a:avLst/>
-            </a:prstGeom>
-          </p:spPr>
-        </p:pic>
-      </p:grpSp>
-      <p:grpSp>
-        <p:nvGrpSpPr>
-          <p:cNvPr id="40" name="Grupo 39">
-            <a:extLst>
-              <a:ext uri="{FF2B5EF4-FFF2-40B4-BE49-F238E27FC236}">
-                <a16:creationId xmlns:a16="http://schemas.microsoft.com/office/drawing/2014/main" id="{1E6696C3-9E51-4DD1-9FF6-C0A5591DF514}"/>
-              </a:ext>
-            </a:extLst>
-          </p:cNvPr>
-          <p:cNvGrpSpPr/>
-          <p:nvPr/>
-        </p:nvGrpSpPr>
-        <p:grpSpPr>
-          <a:xfrm>
-            <a:off x="6768829" y="2711470"/>
-            <a:ext cx="1954949" cy="2069888"/>
-            <a:chOff x="6768829" y="2711470"/>
-            <a:chExt cx="1954949" cy="2069888"/>
-          </a:xfrm>
-        </p:grpSpPr>
-        <p:grpSp>
-          <p:nvGrpSpPr>
-            <p:cNvPr id="31" name="Grupo 30">
-              <a:extLst>
-                <a:ext uri="{FF2B5EF4-FFF2-40B4-BE49-F238E27FC236}">
-                  <a16:creationId xmlns:a16="http://schemas.microsoft.com/office/drawing/2014/main" id="{5947AFD0-F6CE-4DA1-BCFC-D55300476F20}"/>
-                </a:ext>
-              </a:extLst>
-            </p:cNvPr>
-            <p:cNvGrpSpPr/>
-            <p:nvPr/>
-          </p:nvGrpSpPr>
-          <p:grpSpPr>
-            <a:xfrm>
-              <a:off x="6768829" y="2711470"/>
-              <a:ext cx="1954949" cy="1748179"/>
-              <a:chOff x="6768829" y="2711470"/>
-              <a:chExt cx="1954949" cy="1748179"/>
-            </a:xfrm>
-          </p:grpSpPr>
-          <p:pic>
-            <p:nvPicPr>
-              <p:cNvPr id="9" name="Imagen 8">
-                <a:extLst>
-                  <a:ext uri="{FF2B5EF4-FFF2-40B4-BE49-F238E27FC236}">
-                    <a16:creationId xmlns:a16="http://schemas.microsoft.com/office/drawing/2014/main" id="{8C60DB80-24E0-4DB9-BEC1-51308108E264}"/>
-                  </a:ext>
-                </a:extLst>
-              </p:cNvPr>
-              <p:cNvPicPr>
-                <a:picLocks noChangeAspect="1"/>
-              </p:cNvPicPr>
-              <p:nvPr/>
-            </p:nvPicPr>
-            <p:blipFill>
-              <a:blip r:embed="rId6"/>
-              <a:stretch>
-                <a:fillRect/>
-              </a:stretch>
-            </p:blipFill>
-            <p:spPr>
-              <a:xfrm>
-                <a:off x="7026039" y="2720702"/>
-                <a:ext cx="1697739" cy="1738947"/>
-              </a:xfrm>
-              <a:prstGeom prst="rect">
-                <a:avLst/>
-              </a:prstGeom>
-            </p:spPr>
-          </p:pic>
-          <p:pic>
-            <p:nvPicPr>
-              <p:cNvPr id="30" name="Imagen 29">
-                <a:extLst>
-                  <a:ext uri="{FF2B5EF4-FFF2-40B4-BE49-F238E27FC236}">
-                    <a16:creationId xmlns:a16="http://schemas.microsoft.com/office/drawing/2014/main" id="{B5719A9D-BE96-4CF0-B87C-82B2C8985963}"/>
-                  </a:ext>
-                </a:extLst>
-              </p:cNvPr>
-              <p:cNvPicPr>
-                <a:picLocks noChangeAspect="1"/>
-              </p:cNvPicPr>
-              <p:nvPr/>
-            </p:nvPicPr>
-            <p:blipFill rotWithShape="1">
-              <a:blip r:embed="rId7"/>
-              <a:srcRect l="40312"/>
-              <a:stretch/>
-            </p:blipFill>
-            <p:spPr>
-              <a:xfrm>
-                <a:off x="6768829" y="2711470"/>
-                <a:ext cx="343683" cy="1710953"/>
-              </a:xfrm>
-              <a:prstGeom prst="rect">
-                <a:avLst/>
-              </a:prstGeom>
-            </p:spPr>
-          </p:pic>
-        </p:grpSp>
-        <p:pic>
-          <p:nvPicPr>
-            <p:cNvPr id="34" name="Imagen 33">
-              <a:extLst>
-                <a:ext uri="{FF2B5EF4-FFF2-40B4-BE49-F238E27FC236}">
-                  <a16:creationId xmlns:a16="http://schemas.microsoft.com/office/drawing/2014/main" id="{BCF6110D-3B6E-47FA-90F2-6AAE2A98723D}"/>
-                </a:ext>
-              </a:extLst>
-            </p:cNvPr>
-            <p:cNvPicPr>
-              <a:picLocks noChangeAspect="1"/>
-            </p:cNvPicPr>
-            <p:nvPr/>
-          </p:nvPicPr>
-          <p:blipFill rotWithShape="1">
-            <a:blip r:embed="rId5"/>
-            <a:srcRect l="80072"/>
-            <a:stretch/>
-          </p:blipFill>
-          <p:spPr>
-            <a:xfrm>
-              <a:off x="7023708" y="4379658"/>
-              <a:ext cx="1697739" cy="401700"/>
-            </a:xfrm>
-            <a:prstGeom prst="rect">
-              <a:avLst/>
-            </a:prstGeom>
-          </p:spPr>
-        </p:pic>
-      </p:grpSp>
-      <p:grpSp>
-        <p:nvGrpSpPr>
-          <p:cNvPr id="39" name="Grupo 38">
-            <a:extLst>
-              <a:ext uri="{FF2B5EF4-FFF2-40B4-BE49-F238E27FC236}">
-                <a16:creationId xmlns:a16="http://schemas.microsoft.com/office/drawing/2014/main" id="{80544DCB-979F-4BDC-9742-A9A6B77D487B}"/>
-              </a:ext>
-            </a:extLst>
-          </p:cNvPr>
-          <p:cNvGrpSpPr/>
-          <p:nvPr/>
-        </p:nvGrpSpPr>
-        <p:grpSpPr>
-          <a:xfrm>
-            <a:off x="4356775" y="2644098"/>
-            <a:ext cx="2210679" cy="2140261"/>
-            <a:chOff x="4356775" y="2644098"/>
-            <a:chExt cx="2210679" cy="2140261"/>
-          </a:xfrm>
-        </p:grpSpPr>
-        <p:grpSp>
-          <p:nvGrpSpPr>
-            <p:cNvPr id="28" name="Grupo 27">
-              <a:extLst>
-                <a:ext uri="{FF2B5EF4-FFF2-40B4-BE49-F238E27FC236}">
-                  <a16:creationId xmlns:a16="http://schemas.microsoft.com/office/drawing/2014/main" id="{C49EC9AD-42C9-4FAB-AE7A-E807C4754925}"/>
-                </a:ext>
-              </a:extLst>
-            </p:cNvPr>
-            <p:cNvGrpSpPr/>
-            <p:nvPr/>
-          </p:nvGrpSpPr>
-          <p:grpSpPr>
-            <a:xfrm>
-              <a:off x="4356775" y="2644098"/>
-              <a:ext cx="2148941" cy="1770221"/>
-              <a:chOff x="4336837" y="2652201"/>
-              <a:chExt cx="2148941" cy="1770221"/>
-            </a:xfrm>
-          </p:grpSpPr>
-          <p:pic>
-            <p:nvPicPr>
-              <p:cNvPr id="25" name="Imagen 24">
-                <a:extLst>
-                  <a:ext uri="{FF2B5EF4-FFF2-40B4-BE49-F238E27FC236}">
-                    <a16:creationId xmlns:a16="http://schemas.microsoft.com/office/drawing/2014/main" id="{D71992CB-97AB-49B1-BD58-6AC0B77991DD}"/>
-                  </a:ext>
-                </a:extLst>
-              </p:cNvPr>
-              <p:cNvPicPr>
-                <a:picLocks noChangeAspect="1"/>
-              </p:cNvPicPr>
-              <p:nvPr/>
-            </p:nvPicPr>
-            <p:blipFill>
-              <a:blip r:embed="rId8"/>
-              <a:stretch>
-                <a:fillRect/>
-              </a:stretch>
-            </p:blipFill>
-            <p:spPr>
-              <a:xfrm>
-                <a:off x="4771792" y="2683475"/>
-                <a:ext cx="1713986" cy="1738947"/>
-              </a:xfrm>
-              <a:prstGeom prst="rect">
-                <a:avLst/>
-              </a:prstGeom>
-            </p:spPr>
-          </p:pic>
-          <p:pic>
-            <p:nvPicPr>
-              <p:cNvPr id="27" name="Imagen 26">
-                <a:extLst>
-                  <a:ext uri="{FF2B5EF4-FFF2-40B4-BE49-F238E27FC236}">
-                    <a16:creationId xmlns:a16="http://schemas.microsoft.com/office/drawing/2014/main" id="{7E79E6B4-0870-4F10-A29C-51344E7742C6}"/>
-                  </a:ext>
-                </a:extLst>
-              </p:cNvPr>
-              <p:cNvPicPr>
-                <a:picLocks noChangeAspect="1"/>
-              </p:cNvPicPr>
-              <p:nvPr/>
-            </p:nvPicPr>
-            <p:blipFill rotWithShape="1">
-              <a:blip r:embed="rId9"/>
-              <a:srcRect l="23320"/>
-              <a:stretch/>
-            </p:blipFill>
-            <p:spPr>
-              <a:xfrm>
-                <a:off x="4336837" y="2652201"/>
-                <a:ext cx="536886" cy="1763083"/>
-              </a:xfrm>
-              <a:prstGeom prst="rect">
-                <a:avLst/>
-              </a:prstGeom>
-            </p:spPr>
-          </p:pic>
-        </p:grpSp>
-        <p:pic>
-          <p:nvPicPr>
-            <p:cNvPr id="35" name="Imagen 34">
-              <a:extLst>
-                <a:ext uri="{FF2B5EF4-FFF2-40B4-BE49-F238E27FC236}">
-                  <a16:creationId xmlns:a16="http://schemas.microsoft.com/office/drawing/2014/main" id="{BD40D53B-1E0B-47E1-9925-B5D49742E9CA}"/>
-                </a:ext>
-              </a:extLst>
-            </p:cNvPr>
-            <p:cNvPicPr>
-              <a:picLocks noChangeAspect="1"/>
-            </p:cNvPicPr>
-            <p:nvPr/>
-          </p:nvPicPr>
-          <p:blipFill rotWithShape="1">
-            <a:blip r:embed="rId5"/>
-            <a:srcRect l="39937" r="39745"/>
-            <a:stretch/>
-          </p:blipFill>
-          <p:spPr>
-            <a:xfrm>
-              <a:off x="4778282" y="4369134"/>
-              <a:ext cx="1789172" cy="415225"/>
-            </a:xfrm>
-            <a:prstGeom prst="rect">
-              <a:avLst/>
-            </a:prstGeom>
-          </p:spPr>
-        </p:pic>
-      </p:grpSp>
-      <p:grpSp>
-        <p:nvGrpSpPr>
-          <p:cNvPr id="38" name="Grupo 37">
-            <a:extLst>
-              <a:ext uri="{FF2B5EF4-FFF2-40B4-BE49-F238E27FC236}">
-                <a16:creationId xmlns:a16="http://schemas.microsoft.com/office/drawing/2014/main" id="{F2217022-042F-4979-99FF-3D68467FBD98}"/>
-              </a:ext>
-            </a:extLst>
-          </p:cNvPr>
-          <p:cNvGrpSpPr/>
-          <p:nvPr/>
-        </p:nvGrpSpPr>
-        <p:grpSpPr>
-          <a:xfrm>
-            <a:off x="2353235" y="2644098"/>
-            <a:ext cx="1926048" cy="2092660"/>
-            <a:chOff x="2353235" y="2644098"/>
-            <a:chExt cx="1926048" cy="2092660"/>
-          </a:xfrm>
-        </p:grpSpPr>
-        <p:grpSp>
-          <p:nvGrpSpPr>
-            <p:cNvPr id="22" name="Grupo 21">
-              <a:extLst>
-                <a:ext uri="{FF2B5EF4-FFF2-40B4-BE49-F238E27FC236}">
-                  <a16:creationId xmlns:a16="http://schemas.microsoft.com/office/drawing/2014/main" id="{EF94F7D7-32DE-4F83-9064-341F1FF0B2FF}"/>
-                </a:ext>
-              </a:extLst>
-            </p:cNvPr>
-            <p:cNvGrpSpPr/>
-            <p:nvPr/>
-          </p:nvGrpSpPr>
-          <p:grpSpPr>
-            <a:xfrm>
-              <a:off x="2353235" y="2644098"/>
-              <a:ext cx="1926048" cy="1778325"/>
-              <a:chOff x="2420471" y="2650339"/>
-              <a:chExt cx="1926048" cy="1778325"/>
-            </a:xfrm>
-          </p:grpSpPr>
-          <p:pic>
-            <p:nvPicPr>
-              <p:cNvPr id="12" name="Imagen 11">
-                <a:extLst>
-                  <a:ext uri="{FF2B5EF4-FFF2-40B4-BE49-F238E27FC236}">
-                    <a16:creationId xmlns:a16="http://schemas.microsoft.com/office/drawing/2014/main" id="{A9D822AF-3FA3-475D-A7DB-C7FE1A97F5CD}"/>
-                  </a:ext>
-                </a:extLst>
-              </p:cNvPr>
-              <p:cNvPicPr>
-                <a:picLocks noChangeAspect="1"/>
-              </p:cNvPicPr>
-              <p:nvPr/>
-            </p:nvPicPr>
-            <p:blipFill>
-              <a:blip r:embed="rId10"/>
-              <a:stretch>
-                <a:fillRect/>
-              </a:stretch>
-            </p:blipFill>
-            <p:spPr>
-              <a:xfrm>
-                <a:off x="2648585" y="2689717"/>
-                <a:ext cx="1697934" cy="1738947"/>
-              </a:xfrm>
-              <a:prstGeom prst="rect">
-                <a:avLst/>
-              </a:prstGeom>
-            </p:spPr>
-          </p:pic>
-          <p:pic>
-            <p:nvPicPr>
-              <p:cNvPr id="21" name="Imagen 20">
-                <a:extLst>
-                  <a:ext uri="{FF2B5EF4-FFF2-40B4-BE49-F238E27FC236}">
-                    <a16:creationId xmlns:a16="http://schemas.microsoft.com/office/drawing/2014/main" id="{7908D0EB-63C7-4ECF-9F50-27E587B9CB30}"/>
-                  </a:ext>
-                </a:extLst>
-              </p:cNvPr>
-              <p:cNvPicPr>
-                <a:picLocks noChangeAspect="1"/>
-              </p:cNvPicPr>
-              <p:nvPr/>
-            </p:nvPicPr>
-            <p:blipFill rotWithShape="1">
-              <a:blip r:embed="rId11"/>
-              <a:srcRect l="33328"/>
-              <a:stretch/>
-            </p:blipFill>
-            <p:spPr>
-              <a:xfrm>
-                <a:off x="2420471" y="2650339"/>
-                <a:ext cx="331255" cy="1738947"/>
-              </a:xfrm>
-              <a:prstGeom prst="rect">
-                <a:avLst/>
-              </a:prstGeom>
-            </p:spPr>
-          </p:pic>
-        </p:grpSp>
-        <p:pic>
-          <p:nvPicPr>
-            <p:cNvPr id="36" name="Imagen 35">
-              <a:extLst>
-                <a:ext uri="{FF2B5EF4-FFF2-40B4-BE49-F238E27FC236}">
-                  <a16:creationId xmlns:a16="http://schemas.microsoft.com/office/drawing/2014/main" id="{EECB98D8-8A76-46C4-9899-3C344715B1F6}"/>
-                </a:ext>
-              </a:extLst>
-            </p:cNvPr>
-            <p:cNvPicPr>
-              <a:picLocks noChangeAspect="1"/>
-            </p:cNvPicPr>
-            <p:nvPr/>
-          </p:nvPicPr>
-          <p:blipFill rotWithShape="1">
-            <a:blip r:embed="rId5"/>
-            <a:srcRect l="20033" r="59969"/>
-            <a:stretch/>
-          </p:blipFill>
-          <p:spPr>
-            <a:xfrm>
-              <a:off x="2601707" y="4345985"/>
-              <a:ext cx="1657404" cy="390773"/>
-            </a:xfrm>
-            <a:prstGeom prst="rect">
-              <a:avLst/>
-            </a:prstGeom>
-          </p:spPr>
-        </p:pic>
-      </p:grpSp>
-      <p:grpSp>
-        <p:nvGrpSpPr>
-          <p:cNvPr id="43" name="Grupo 42">
-            <a:extLst>
-              <a:ext uri="{FF2B5EF4-FFF2-40B4-BE49-F238E27FC236}">
-                <a16:creationId xmlns:a16="http://schemas.microsoft.com/office/drawing/2014/main" id="{C91D2978-8AA7-42CF-A876-EBA4A8B6FB93}"/>
-              </a:ext>
-            </a:extLst>
-          </p:cNvPr>
-          <p:cNvGrpSpPr/>
-          <p:nvPr/>
-        </p:nvGrpSpPr>
-        <p:grpSpPr>
-          <a:xfrm>
-            <a:off x="345918" y="1093455"/>
-            <a:ext cx="5446059" cy="704721"/>
-            <a:chOff x="3546697" y="1039314"/>
-            <a:chExt cx="5446059" cy="704721"/>
-          </a:xfrm>
-        </p:grpSpPr>
-        <p:sp>
-          <p:nvSpPr>
-            <p:cNvPr id="41" name="CuadroTexto 40">
-              <a:extLst>
-                <a:ext uri="{FF2B5EF4-FFF2-40B4-BE49-F238E27FC236}">
-                  <a16:creationId xmlns:a16="http://schemas.microsoft.com/office/drawing/2014/main" id="{EBA7E524-F1E8-43EE-A575-F0302F25379C}"/>
-                </a:ext>
-              </a:extLst>
-            </p:cNvPr>
-            <p:cNvSpPr txBox="1"/>
-            <p:nvPr/>
-          </p:nvSpPr>
-          <p:spPr>
-            <a:xfrm>
-              <a:off x="3546697" y="1220815"/>
-              <a:ext cx="5446059" cy="523220"/>
-            </a:xfrm>
-            <a:prstGeom prst="rect">
-              <a:avLst/>
-            </a:prstGeom>
-            <a:noFill/>
-          </p:spPr>
-          <p:txBody>
-            <a:bodyPr wrap="square" rtlCol="0">
-              <a:spAutoFit/>
-            </a:bodyPr>
-            <a:lstStyle/>
-            <a:p>
-              <a:r>
-                <a:rPr lang="es-ES" dirty="0"/>
-                <a:t>Compras pasadas (Primer 70%) | Compras Futuras (Último 30%)</a:t>
-              </a:r>
-            </a:p>
-            <a:p>
-              <a:r>
-                <a:rPr lang="es-ES" dirty="0"/>
-                <a:t>		      </a:t>
-              </a:r>
-              <a:r>
-                <a:rPr lang="es-ES" dirty="0" err="1"/>
-                <a:t>Cut</a:t>
-              </a:r>
-              <a:r>
-                <a:rPr lang="es-ES" dirty="0"/>
-                <a:t>-off Date</a:t>
-              </a:r>
-            </a:p>
-          </p:txBody>
-        </p:sp>
-        <p:pic>
-          <p:nvPicPr>
-            <p:cNvPr id="5122" name="Picture 2" descr="Curved Arrow Right Red Icon SVG Vector &amp; PNG Free Download | UXWing">
-              <a:extLst>
-                <a:ext uri="{FF2B5EF4-FFF2-40B4-BE49-F238E27FC236}">
-                  <a16:creationId xmlns:a16="http://schemas.microsoft.com/office/drawing/2014/main" id="{00EF7308-500D-4FAA-ADE1-89A028F010C1}"/>
-                </a:ext>
-              </a:extLst>
-            </p:cNvPr>
-            <p:cNvPicPr>
-              <a:picLocks noChangeAspect="1" noChangeArrowheads="1"/>
-            </p:cNvPicPr>
-            <p:nvPr/>
-          </p:nvPicPr>
-          <p:blipFill>
-            <a:blip r:embed="rId12">
-              <a:extLst>
-                <a:ext uri="{28A0092B-C50C-407E-A947-70E740481C1C}">
-                  <a14:useLocalDpi xmlns:a14="http://schemas.microsoft.com/office/drawing/2010/main" val="0"/>
-                </a:ext>
-              </a:extLst>
-            </a:blip>
-            <a:srcRect/>
-            <a:stretch>
-              <a:fillRect/>
-            </a:stretch>
-          </p:blipFill>
-          <p:spPr bwMode="auto">
-            <a:xfrm rot="8733034" flipV="1">
-              <a:off x="6059561" y="1039314"/>
-              <a:ext cx="295868" cy="313471"/>
-            </a:xfrm>
-            <a:prstGeom prst="rect">
-              <a:avLst/>
-            </a:prstGeom>
-            <a:noFill/>
-            <a:extLst>
-              <a:ext uri="{909E8E84-426E-40DD-AFC4-6F175D3DCCD1}">
-                <a14:hiddenFill xmlns:a14="http://schemas.microsoft.com/office/drawing/2010/main">
-                  <a:solidFill>
-                    <a:srgbClr val="FFFFFF"/>
-                  </a:solidFill>
-                </a14:hiddenFill>
-              </a:ext>
-            </a:extLst>
-          </p:spPr>
-        </p:pic>
-      </p:grpSp>
+      </p:pic>
     </p:spTree>
     <p:extLst>
       <p:ext uri="{BB962C8B-B14F-4D97-AF65-F5344CB8AC3E}">
-        <p14:creationId xmlns:p14="http://schemas.microsoft.com/office/powerpoint/2010/main" val="3022894790"/>
+        <p14:creationId xmlns:p14="http://schemas.microsoft.com/office/powerpoint/2010/main" val="3084571350"/>
       </p:ext>
     </p:extLst>
   </p:cSld>
@@ -8225,13 +7423,22 @@
           <a:lstStyle/>
           <a:p>
             <a:r>
+              <a:rPr lang="es-ES" b="1" dirty="0">
+                <a:solidFill>
+                  <a:schemeClr val="bg1"/>
+                </a:solidFill>
+                <a:latin typeface="Bahnschrift" panose="020B0502040204020203" pitchFamily="34" charset="0"/>
+              </a:rPr>
+              <a:t>Posicionamiento de </a:t>
+            </a:r>
+            <a:r>
               <a:rPr lang="es-ES" b="1" dirty="0" err="1">
                 <a:solidFill>
                   <a:schemeClr val="bg1"/>
                 </a:solidFill>
                 <a:latin typeface="Bahnschrift" panose="020B0502040204020203" pitchFamily="34" charset="0"/>
               </a:rPr>
-              <a:t>Topics</a:t>
+              <a:t>ElectricalWorld</a:t>
             </a:r>
             <a:endParaRPr lang="es-ES" b="1" dirty="0">
               <a:solidFill>
@@ -8242,42 +7449,120 @@
           </a:p>
         </p:txBody>
       </p:sp>
-      <p:pic>
-        <p:nvPicPr>
-          <p:cNvPr id="9" name="Imagen 8">
+      <p:grpSp>
+        <p:nvGrpSpPr>
+          <p:cNvPr id="24" name="Grupo 23">
             <a:extLst>
               <a:ext uri="{FF2B5EF4-FFF2-40B4-BE49-F238E27FC236}">
-                <a16:creationId xmlns:a16="http://schemas.microsoft.com/office/drawing/2014/main" id="{2D2E2FFC-1A42-4243-823E-823E5FAC4863}"/>
+                <a16:creationId xmlns:a16="http://schemas.microsoft.com/office/drawing/2014/main" id="{B1CFA39E-7DFC-429E-BAA6-6429A0C5A74A}"/>
               </a:ext>
             </a:extLst>
           </p:cNvPr>
-          <p:cNvPicPr>
-            <a:picLocks noChangeAspect="1"/>
-          </p:cNvPicPr>
+          <p:cNvGrpSpPr/>
           <p:nvPr/>
-        </p:nvPicPr>
-        <p:blipFill>
-          <a:blip r:embed="rId3"/>
-          <a:stretch>
-            <a:fillRect/>
-          </a:stretch>
-        </p:blipFill>
-        <p:spPr>
+        </p:nvGrpSpPr>
+        <p:grpSpPr>
           <a:xfrm>
-            <a:off x="311700" y="1216103"/>
-            <a:ext cx="6273053" cy="2093598"/>
+            <a:off x="208838" y="1108101"/>
+            <a:ext cx="3640986" cy="1916511"/>
+            <a:chOff x="499462" y="1235692"/>
+            <a:chExt cx="3640986" cy="1916511"/>
           </a:xfrm>
-          <a:prstGeom prst="rect">
-            <a:avLst/>
-          </a:prstGeom>
-        </p:spPr>
-      </p:pic>
+        </p:grpSpPr>
+        <p:pic>
+          <p:nvPicPr>
+            <p:cNvPr id="13" name="Imagen 12">
+              <a:extLst>
+                <a:ext uri="{FF2B5EF4-FFF2-40B4-BE49-F238E27FC236}">
+                  <a16:creationId xmlns:a16="http://schemas.microsoft.com/office/drawing/2014/main" id="{4227340B-325A-46F7-ADE8-C21B2EE9D8CB}"/>
+                </a:ext>
+              </a:extLst>
+            </p:cNvPr>
+            <p:cNvPicPr>
+              <a:picLocks noChangeAspect="1"/>
+            </p:cNvPicPr>
+            <p:nvPr/>
+          </p:nvPicPr>
+          <p:blipFill rotWithShape="1">
+            <a:blip r:embed="rId3"/>
+            <a:srcRect t="11998" r="34914"/>
+            <a:stretch/>
+          </p:blipFill>
+          <p:spPr>
+            <a:xfrm>
+              <a:off x="499462" y="1473437"/>
+              <a:ext cx="3505868" cy="1678766"/>
+            </a:xfrm>
+            <a:prstGeom prst="rect">
+              <a:avLst/>
+            </a:prstGeom>
+          </p:spPr>
+        </p:pic>
+        <p:pic>
+          <p:nvPicPr>
+            <p:cNvPr id="44" name="Imagen 43">
+              <a:extLst>
+                <a:ext uri="{FF2B5EF4-FFF2-40B4-BE49-F238E27FC236}">
+                  <a16:creationId xmlns:a16="http://schemas.microsoft.com/office/drawing/2014/main" id="{D14BF200-998C-4D75-8DD8-BF05AE213B19}"/>
+                </a:ext>
+              </a:extLst>
+            </p:cNvPr>
+            <p:cNvPicPr>
+              <a:picLocks noChangeAspect="1"/>
+            </p:cNvPicPr>
+            <p:nvPr/>
+          </p:nvPicPr>
+          <p:blipFill rotWithShape="1">
+            <a:blip r:embed="rId3"/>
+            <a:srcRect l="39230" t="11998"/>
+            <a:stretch/>
+          </p:blipFill>
+          <p:spPr>
+            <a:xfrm>
+              <a:off x="867049" y="1473437"/>
+              <a:ext cx="3273399" cy="1678766"/>
+            </a:xfrm>
+            <a:prstGeom prst="rect">
+              <a:avLst/>
+            </a:prstGeom>
+          </p:spPr>
+        </p:pic>
+        <p:pic>
+          <p:nvPicPr>
+            <p:cNvPr id="45" name="Imagen 44">
+              <a:extLst>
+                <a:ext uri="{FF2B5EF4-FFF2-40B4-BE49-F238E27FC236}">
+                  <a16:creationId xmlns:a16="http://schemas.microsoft.com/office/drawing/2014/main" id="{F5A038E9-420F-4E2B-8E0A-6A1F27E776A8}"/>
+                </a:ext>
+              </a:extLst>
+            </p:cNvPr>
+            <p:cNvPicPr>
+              <a:picLocks noChangeAspect="1"/>
+            </p:cNvPicPr>
+            <p:nvPr/>
+          </p:nvPicPr>
+          <p:blipFill rotWithShape="1">
+            <a:blip r:embed="rId3"/>
+            <a:srcRect l="21133" t="47" r="16703" b="87490"/>
+            <a:stretch/>
+          </p:blipFill>
+          <p:spPr>
+            <a:xfrm>
+              <a:off x="724382" y="1235692"/>
+              <a:ext cx="3348507" cy="237745"/>
+            </a:xfrm>
+            <a:prstGeom prst="rect">
+              <a:avLst/>
+            </a:prstGeom>
+          </p:spPr>
+        </p:pic>
+      </p:grpSp>
       <p:pic>
         <p:nvPicPr>
-          <p:cNvPr id="10" name="Imagen 9">
+          <p:cNvPr id="29" name="Imagen 28">
             <a:extLst>
               <a:ext uri="{FF2B5EF4-FFF2-40B4-BE49-F238E27FC236}">
-                <a16:creationId xmlns:a16="http://schemas.microsoft.com/office/drawing/2014/main" id="{1E607CA7-DDAD-4030-9B94-6A76A9DD0279}"/>
+                <a16:creationId xmlns:a16="http://schemas.microsoft.com/office/drawing/2014/main" id="{05B046AA-7D5D-4DD8-95D3-C0310F5567CD}"/>
               </a:ext>
             </a:extLst>
           </p:cNvPr>
@@ -8294,100 +7579,18 @@
         </p:blipFill>
         <p:spPr>
           <a:xfrm>
-            <a:off x="6665985" y="1269733"/>
-            <a:ext cx="2166315" cy="1717239"/>
+            <a:off x="2637172" y="2902566"/>
+            <a:ext cx="6135867" cy="2059805"/>
           </a:xfrm>
           <a:prstGeom prst="rect">
             <a:avLst/>
           </a:prstGeom>
         </p:spPr>
       </p:pic>
-      <p:pic>
-        <p:nvPicPr>
-          <p:cNvPr id="3" name="Imagen 2">
-            <a:extLst>
-              <a:ext uri="{FF2B5EF4-FFF2-40B4-BE49-F238E27FC236}">
-                <a16:creationId xmlns:a16="http://schemas.microsoft.com/office/drawing/2014/main" id="{B6B501D4-34DD-4A0C-90E6-700C2359DFBD}"/>
-              </a:ext>
-            </a:extLst>
-          </p:cNvPr>
-          <p:cNvPicPr>
-            <a:picLocks noChangeAspect="1"/>
-          </p:cNvPicPr>
-          <p:nvPr/>
-        </p:nvPicPr>
-        <p:blipFill>
-          <a:blip r:embed="rId5"/>
-          <a:stretch>
-            <a:fillRect/>
-          </a:stretch>
-        </p:blipFill>
-        <p:spPr>
-          <a:xfrm>
-            <a:off x="2653947" y="3308734"/>
-            <a:ext cx="3836106" cy="1452726"/>
-          </a:xfrm>
-          <a:prstGeom prst="rect">
-            <a:avLst/>
-          </a:prstGeom>
-        </p:spPr>
-      </p:pic>
-      <p:sp>
-        <p:nvSpPr>
-          <p:cNvPr id="4" name="Rectángulo 3">
-            <a:extLst>
-              <a:ext uri="{FF2B5EF4-FFF2-40B4-BE49-F238E27FC236}">
-                <a16:creationId xmlns:a16="http://schemas.microsoft.com/office/drawing/2014/main" id="{A7C79449-6709-4204-A1E4-E42B4511D791}"/>
-              </a:ext>
-            </a:extLst>
-          </p:cNvPr>
-          <p:cNvSpPr/>
-          <p:nvPr/>
-        </p:nvSpPr>
-        <p:spPr>
-          <a:xfrm>
-            <a:off x="2653947" y="4538382"/>
-            <a:ext cx="3836106" cy="223078"/>
-          </a:xfrm>
-          <a:prstGeom prst="rect">
-            <a:avLst/>
-          </a:prstGeom>
-          <a:solidFill>
-            <a:srgbClr val="92D050">
-              <a:alpha val="50000"/>
-            </a:srgbClr>
-          </a:solidFill>
-          <a:ln>
-            <a:noFill/>
-          </a:ln>
-        </p:spPr>
-        <p:style>
-          <a:lnRef idx="0">
-            <a:scrgbClr r="0" g="0" b="0"/>
-          </a:lnRef>
-          <a:fillRef idx="0">
-            <a:scrgbClr r="0" g="0" b="0"/>
-          </a:fillRef>
-          <a:effectRef idx="0">
-            <a:scrgbClr r="0" g="0" b="0"/>
-          </a:effectRef>
-          <a:fontRef idx="minor">
-            <a:schemeClr val="lt1"/>
-          </a:fontRef>
-        </p:style>
-        <p:txBody>
-          <a:bodyPr rtlCol="0" anchor="ctr"/>
-          <a:lstStyle/>
-          <a:p>
-            <a:pPr algn="ctr"/>
-            <a:endParaRPr lang="es-ES"/>
-          </a:p>
-        </p:txBody>
-      </p:sp>
     </p:spTree>
     <p:extLst>
       <p:ext uri="{BB962C8B-B14F-4D97-AF65-F5344CB8AC3E}">
-        <p14:creationId xmlns:p14="http://schemas.microsoft.com/office/powerpoint/2010/main" val="2483481626"/>
+        <p14:creationId xmlns:p14="http://schemas.microsoft.com/office/powerpoint/2010/main" val="3022894790"/>
       </p:ext>
     </p:extLst>
   </p:cSld>
@@ -8465,8 +7668,23 @@
                 </a:solidFill>
                 <a:latin typeface="Bahnschrift" panose="020B0502040204020203" pitchFamily="34" charset="0"/>
               </a:rPr>
-              <a:t>Variables</a:t>
+              <a:t>Temas de las Reseñas de </a:t>
             </a:r>
+            <a:r>
+              <a:rPr lang="es-ES" b="1" dirty="0" err="1">
+                <a:solidFill>
+                  <a:schemeClr val="bg1"/>
+                </a:solidFill>
+                <a:latin typeface="Bahnschrift" panose="020B0502040204020203" pitchFamily="34" charset="0"/>
+              </a:rPr>
+              <a:t>ElectricalWorld</a:t>
+            </a:r>
+            <a:endParaRPr lang="es-ES" b="1" dirty="0">
+              <a:solidFill>
+                <a:schemeClr val="bg1"/>
+              </a:solidFill>
+              <a:latin typeface="Bahnschrift" panose="020B0502040204020203" pitchFamily="34" charset="0"/>
+            </a:endParaRPr>
           </a:p>
         </p:txBody>
       </p:sp>
@@ -8475,7 +7693,7 @@
           <p:cNvPr id="6" name="Imagen 5">
             <a:extLst>
               <a:ext uri="{FF2B5EF4-FFF2-40B4-BE49-F238E27FC236}">
-                <a16:creationId xmlns:a16="http://schemas.microsoft.com/office/drawing/2014/main" id="{3AAF6611-9B22-4459-AE47-427CD0D801DC}"/>
+                <a16:creationId xmlns:a16="http://schemas.microsoft.com/office/drawing/2014/main" id="{BA3F534B-1E14-4413-884B-1415610F8774}"/>
               </a:ext>
             </a:extLst>
           </p:cNvPr>
@@ -8484,15 +7702,16 @@
           </p:cNvPicPr>
           <p:nvPr/>
         </p:nvPicPr>
-        <p:blipFill rotWithShape="1">
+        <p:blipFill>
           <a:blip r:embed="rId3"/>
-          <a:srcRect t="4225"/>
-          <a:stretch/>
+          <a:stretch>
+            <a:fillRect/>
+          </a:stretch>
         </p:blipFill>
         <p:spPr>
           <a:xfrm>
-            <a:off x="169299" y="1808735"/>
-            <a:ext cx="5201593" cy="2762393"/>
+            <a:off x="153681" y="1142387"/>
+            <a:ext cx="5595456" cy="1998377"/>
           </a:xfrm>
           <a:prstGeom prst="rect">
             <a:avLst/>
@@ -8501,10 +7720,10 @@
       </p:pic>
       <p:pic>
         <p:nvPicPr>
-          <p:cNvPr id="7" name="Imagen 6">
+          <p:cNvPr id="8" name="Imagen 7">
             <a:extLst>
               <a:ext uri="{FF2B5EF4-FFF2-40B4-BE49-F238E27FC236}">
-                <a16:creationId xmlns:a16="http://schemas.microsoft.com/office/drawing/2014/main" id="{F48A6025-E0FA-4E17-89D9-A985C176DDBF}"/>
+                <a16:creationId xmlns:a16="http://schemas.microsoft.com/office/drawing/2014/main" id="{33A1CC4C-8898-4754-BA02-100BADA54A4D}"/>
               </a:ext>
             </a:extLst>
           </p:cNvPr>
@@ -8513,119 +7732,242 @@
           </p:cNvPicPr>
           <p:nvPr/>
         </p:nvPicPr>
-        <p:blipFill rotWithShape="1">
+        <p:blipFill>
           <a:blip r:embed="rId4"/>
-          <a:srcRect l="4062" t="4657" b="173"/>
-          <a:stretch/>
+          <a:stretch>
+            <a:fillRect/>
+          </a:stretch>
         </p:blipFill>
         <p:spPr>
           <a:xfrm>
-            <a:off x="5505363" y="1808735"/>
-            <a:ext cx="3228502" cy="3041704"/>
+            <a:off x="5128440" y="3281340"/>
+            <a:ext cx="3056710" cy="1314912"/>
           </a:xfrm>
           <a:prstGeom prst="rect">
             <a:avLst/>
           </a:prstGeom>
         </p:spPr>
       </p:pic>
-      <p:sp>
-        <p:nvSpPr>
-          <p:cNvPr id="11" name="Rectángulo 10">
+      <p:pic>
+        <p:nvPicPr>
+          <p:cNvPr id="12" name="Imagen 11">
             <a:extLst>
               <a:ext uri="{FF2B5EF4-FFF2-40B4-BE49-F238E27FC236}">
-                <a16:creationId xmlns:a16="http://schemas.microsoft.com/office/drawing/2014/main" id="{F952D770-1D3E-4AF3-959D-1652C9E1AB6B}"/>
+                <a16:creationId xmlns:a16="http://schemas.microsoft.com/office/drawing/2014/main" id="{046F1549-7510-462D-8497-D33683A19279}"/>
               </a:ext>
             </a:extLst>
           </p:cNvPr>
-          <p:cNvSpPr/>
+          <p:cNvPicPr>
+            <a:picLocks noChangeAspect="1"/>
+          </p:cNvPicPr>
           <p:nvPr/>
-        </p:nvSpPr>
+        </p:nvPicPr>
+        <p:blipFill>
+          <a:blip r:embed="rId5"/>
+          <a:stretch>
+            <a:fillRect/>
+          </a:stretch>
+        </p:blipFill>
         <p:spPr>
           <a:xfrm>
-            <a:off x="847167" y="1262980"/>
-            <a:ext cx="4114800" cy="398877"/>
+            <a:off x="4768849" y="3018566"/>
+            <a:ext cx="4271047" cy="1840460"/>
           </a:xfrm>
           <a:prstGeom prst="rect">
             <a:avLst/>
           </a:prstGeom>
         </p:spPr>
-        <p:style>
-          <a:lnRef idx="2">
-            <a:schemeClr val="dk1"/>
-          </a:lnRef>
-          <a:fillRef idx="1">
-            <a:schemeClr val="lt1"/>
-          </a:fillRef>
-          <a:effectRef idx="0">
-            <a:schemeClr val="dk1"/>
-          </a:effectRef>
-          <a:fontRef idx="minor">
-            <a:schemeClr val="dk1"/>
-          </a:fontRef>
-        </p:style>
-        <p:txBody>
-          <a:bodyPr rtlCol="0" anchor="ctr"/>
-          <a:lstStyle/>
-          <a:p>
-            <a:pPr algn="ctr"/>
-            <a:r>
-              <a:rPr lang="es-ES" dirty="0">
-                <a:latin typeface="Bahnschrift" panose="020B0502040204020203" pitchFamily="34" charset="0"/>
-              </a:rPr>
-              <a:t>Importancia (Normalizada) por Modelo</a:t>
-            </a:r>
-          </a:p>
-        </p:txBody>
-      </p:sp>
-      <p:sp>
-        <p:nvSpPr>
-          <p:cNvPr id="12" name="Rectángulo 11">
+      </p:pic>
+      <p:pic>
+        <p:nvPicPr>
+          <p:cNvPr id="14" name="Imagen 13">
             <a:extLst>
               <a:ext uri="{FF2B5EF4-FFF2-40B4-BE49-F238E27FC236}">
-                <a16:creationId xmlns:a16="http://schemas.microsoft.com/office/drawing/2014/main" id="{001F9093-F881-4CA1-865F-CE64A82BDD79}"/>
+                <a16:creationId xmlns:a16="http://schemas.microsoft.com/office/drawing/2014/main" id="{B9341161-EE6A-473C-94C5-38D245E8C522}"/>
               </a:ext>
             </a:extLst>
           </p:cNvPr>
-          <p:cNvSpPr/>
+          <p:cNvPicPr>
+            <a:picLocks noChangeAspect="1"/>
+          </p:cNvPicPr>
           <p:nvPr/>
-        </p:nvSpPr>
+        </p:nvPicPr>
+        <p:blipFill>
+          <a:blip r:embed="rId6"/>
+          <a:stretch>
+            <a:fillRect/>
+          </a:stretch>
+        </p:blipFill>
         <p:spPr>
           <a:xfrm>
-            <a:off x="5465022" y="1262980"/>
-            <a:ext cx="3309184" cy="398877"/>
+            <a:off x="204481" y="1110311"/>
+            <a:ext cx="5861050" cy="2062527"/>
           </a:xfrm>
           <a:prstGeom prst="rect">
             <a:avLst/>
           </a:prstGeom>
         </p:spPr>
+      </p:pic>
+    </p:spTree>
+    <p:extLst>
+      <p:ext uri="{BB962C8B-B14F-4D97-AF65-F5344CB8AC3E}">
+        <p14:creationId xmlns:p14="http://schemas.microsoft.com/office/powerpoint/2010/main" val="2483481626"/>
+      </p:ext>
+    </p:extLst>
+  </p:cSld>
+  <p:clrMapOvr>
+    <a:masterClrMapping/>
+  </p:clrMapOvr>
+</p:sld>
+</file>
+
+<file path=ppt/slides/slide7.xml><?xml version="1.0" encoding="utf-8"?>
+<p:sld xmlns:a="http://schemas.openxmlformats.org/drawingml/2006/main" xmlns:r="http://schemas.openxmlformats.org/officeDocument/2006/relationships" xmlns:p="http://schemas.openxmlformats.org/presentationml/2006/main">
+  <p:cSld>
+    <p:spTree>
+      <p:nvGrpSpPr>
+        <p:cNvPr id="1" name="Shape 58"/>
+        <p:cNvGrpSpPr/>
+        <p:nvPr/>
+      </p:nvGrpSpPr>
+      <p:grpSpPr>
+        <a:xfrm>
+          <a:off x="0" y="0"/>
+          <a:ext cx="0" cy="0"/>
+          <a:chOff x="0" y="0"/>
+          <a:chExt cx="0" cy="0"/>
+        </a:xfrm>
+      </p:grpSpPr>
+      <p:sp>
+        <p:nvSpPr>
+          <p:cNvPr id="5" name="Título 4">
+            <a:extLst>
+              <a:ext uri="{FF2B5EF4-FFF2-40B4-BE49-F238E27FC236}">
+                <a16:creationId xmlns:a16="http://schemas.microsoft.com/office/drawing/2014/main" id="{9F8A6A0B-8E0A-4567-B1E1-CC28F2F1D109}"/>
+              </a:ext>
+            </a:extLst>
+          </p:cNvPr>
+          <p:cNvSpPr>
+            <a:spLocks noGrp="1"/>
+          </p:cNvSpPr>
+          <p:nvPr>
+            <p:ph type="title"/>
+          </p:nvPr>
+        </p:nvSpPr>
+        <p:spPr>
+          <a:xfrm>
+            <a:off x="311700" y="382040"/>
+            <a:ext cx="8520600" cy="572700"/>
+          </a:xfrm>
+        </p:spPr>
         <p:style>
           <a:lnRef idx="2">
-            <a:schemeClr val="dk1"/>
+            <a:schemeClr val="accent2">
+              <a:shade val="50000"/>
+            </a:schemeClr>
           </a:lnRef>
           <a:fillRef idx="1">
-            <a:schemeClr val="lt1"/>
+            <a:schemeClr val="accent2"/>
           </a:fillRef>
           <a:effectRef idx="0">
-            <a:schemeClr val="dk1"/>
+            <a:schemeClr val="accent2"/>
           </a:effectRef>
           <a:fontRef idx="minor">
-            <a:schemeClr val="dk1"/>
+            <a:schemeClr val="lt1"/>
           </a:fontRef>
         </p:style>
         <p:txBody>
-          <a:bodyPr rtlCol="0" anchor="ctr"/>
+          <a:bodyPr>
+            <a:normAutofit fontScale="90000"/>
+          </a:bodyPr>
           <a:lstStyle/>
           <a:p>
-            <a:pPr algn="ctr"/>
             <a:r>
-              <a:rPr lang="es-ES" dirty="0">
+              <a:rPr lang="es-ES" b="1" dirty="0">
+                <a:solidFill>
+                  <a:schemeClr val="bg1"/>
+                </a:solidFill>
                 <a:latin typeface="Bahnschrift" panose="020B0502040204020203" pitchFamily="34" charset="0"/>
               </a:rPr>
-              <a:t>Importancia Media (Todos los Modelos)</a:t>
+              <a:t>Sentimiento por temas vs otras compañías</a:t>
             </a:r>
+            <a:br>
+              <a:rPr lang="es-ES" b="1" dirty="0">
+                <a:solidFill>
+                  <a:schemeClr val="bg1"/>
+                </a:solidFill>
+                <a:latin typeface="Bahnschrift" panose="020B0502040204020203" pitchFamily="34" charset="0"/>
+              </a:rPr>
+            </a:br>
+            <a:endParaRPr lang="es-ES" b="1" dirty="0">
+              <a:solidFill>
+                <a:schemeClr val="bg1"/>
+              </a:solidFill>
+              <a:latin typeface="Bahnschrift" panose="020B0502040204020203" pitchFamily="34" charset="0"/>
+            </a:endParaRPr>
           </a:p>
         </p:txBody>
       </p:sp>
+      <p:pic>
+        <p:nvPicPr>
+          <p:cNvPr id="3" name="Imagen 2">
+            <a:extLst>
+              <a:ext uri="{FF2B5EF4-FFF2-40B4-BE49-F238E27FC236}">
+                <a16:creationId xmlns:a16="http://schemas.microsoft.com/office/drawing/2014/main" id="{45535DA9-F4D3-4513-8052-62821EDE2994}"/>
+              </a:ext>
+            </a:extLst>
+          </p:cNvPr>
+          <p:cNvPicPr>
+            <a:picLocks noChangeAspect="1"/>
+          </p:cNvPicPr>
+          <p:nvPr/>
+        </p:nvPicPr>
+        <p:blipFill>
+          <a:blip r:embed="rId3"/>
+          <a:stretch>
+            <a:fillRect/>
+          </a:stretch>
+        </p:blipFill>
+        <p:spPr>
+          <a:xfrm>
+            <a:off x="1514289" y="1707549"/>
+            <a:ext cx="5089711" cy="2080200"/>
+          </a:xfrm>
+          <a:prstGeom prst="rect">
+            <a:avLst/>
+          </a:prstGeom>
+        </p:spPr>
+      </p:pic>
+      <p:pic>
+        <p:nvPicPr>
+          <p:cNvPr id="8" name="Imagen 7">
+            <a:extLst>
+              <a:ext uri="{FF2B5EF4-FFF2-40B4-BE49-F238E27FC236}">
+                <a16:creationId xmlns:a16="http://schemas.microsoft.com/office/drawing/2014/main" id="{0C656AAC-F036-49BF-9B9A-0070D69D2532}"/>
+              </a:ext>
+            </a:extLst>
+          </p:cNvPr>
+          <p:cNvPicPr>
+            <a:picLocks noChangeAspect="1"/>
+          </p:cNvPicPr>
+          <p:nvPr/>
+        </p:nvPicPr>
+        <p:blipFill>
+          <a:blip r:embed="rId4"/>
+          <a:stretch>
+            <a:fillRect/>
+          </a:stretch>
+        </p:blipFill>
+        <p:spPr>
+          <a:xfrm>
+            <a:off x="609600" y="1313335"/>
+            <a:ext cx="7924800" cy="3238921"/>
+          </a:xfrm>
+          <a:prstGeom prst="rect">
+            <a:avLst/>
+          </a:prstGeom>
+        </p:spPr>
+      </p:pic>
     </p:spTree>
     <p:extLst>
       <p:ext uri="{BB962C8B-B14F-4D97-AF65-F5344CB8AC3E}">
@@ -8639,7 +7981,7 @@
 </p:sld>
 </file>
 
-<file path=ppt/slides/slide7.xml><?xml version="1.0" encoding="utf-8"?>
+<file path=ppt/slides/slide8.xml><?xml version="1.0" encoding="utf-8"?>
 <p:sld xmlns:a="http://schemas.openxmlformats.org/drawingml/2006/main" xmlns:r="http://schemas.openxmlformats.org/officeDocument/2006/relationships" xmlns:p="http://schemas.openxmlformats.org/presentationml/2006/main">
   <p:cSld>
     <p:spTree>
@@ -8726,7 +8068,7 @@
         </p:nvSpPr>
         <p:spPr>
           <a:xfrm>
-            <a:off x="311700" y="1433870"/>
+            <a:off x="311700" y="1087752"/>
             <a:ext cx="4085488" cy="398877"/>
           </a:xfrm>
           <a:prstGeom prst="rect">
@@ -8775,7 +8117,7 @@
         </p:nvSpPr>
         <p:spPr>
           <a:xfrm>
-            <a:off x="4746811" y="1433869"/>
+            <a:off x="311700" y="3399327"/>
             <a:ext cx="4085488" cy="398877"/>
           </a:xfrm>
           <a:prstGeom prst="rect">
@@ -8812,191 +8154,6 @@
       </p:sp>
       <p:sp>
         <p:nvSpPr>
-          <p:cNvPr id="24" name="Google Shape;97;p17">
-            <a:extLst>
-              <a:ext uri="{FF2B5EF4-FFF2-40B4-BE49-F238E27FC236}">
-                <a16:creationId xmlns:a16="http://schemas.microsoft.com/office/drawing/2014/main" id="{56286245-75E3-438C-A360-66B50DE366D7}"/>
-              </a:ext>
-            </a:extLst>
-          </p:cNvPr>
-          <p:cNvSpPr txBox="1">
-            <a:spLocks noGrp="1"/>
-          </p:cNvSpPr>
-          <p:nvPr>
-            <p:ph type="body" idx="1"/>
-          </p:nvPr>
-        </p:nvSpPr>
-        <p:spPr>
-          <a:xfrm>
-            <a:off x="311700" y="2018519"/>
-            <a:ext cx="4085488" cy="2347500"/>
-          </a:xfrm>
-          <a:prstGeom prst="rect">
-            <a:avLst/>
-          </a:prstGeom>
-          <a:ln w="9525" cap="flat" cmpd="sng">
-            <a:solidFill>
-              <a:schemeClr val="dk1"/>
-            </a:solidFill>
-            <a:prstDash val="solid"/>
-            <a:round/>
-            <a:headEnd type="none" w="sm" len="sm"/>
-            <a:tailEnd type="none" w="sm" len="sm"/>
-          </a:ln>
-        </p:spPr>
-        <p:txBody>
-          <a:bodyPr spcFirstLastPara="1" wrap="square" lIns="91425" tIns="91425" rIns="91425" bIns="91425" anchor="t" anchorCtr="0">
-            <a:normAutofit/>
-          </a:bodyPr>
-          <a:lstStyle/>
-          <a:p>
-            <a:pPr marL="0" lvl="0" indent="0" algn="l" rtl="0">
-              <a:spcBef>
-                <a:spcPts val="0"/>
-              </a:spcBef>
-              <a:spcAft>
-                <a:spcPts val="0"/>
-              </a:spcAft>
-              <a:buNone/>
-            </a:pPr>
-            <a:r>
-              <a:rPr lang="es-ES" sz="1200" dirty="0">
-                <a:latin typeface="Bahnschrift" panose="020B0502040204020203" pitchFamily="34" charset="0"/>
-              </a:rPr>
-              <a:t>Clientes con </a:t>
-            </a:r>
-            <a:r>
-              <a:rPr lang="es-ES" sz="1200" b="1" dirty="0">
-                <a:latin typeface="Bahnschrift" panose="020B0502040204020203" pitchFamily="34" charset="0"/>
-              </a:rPr>
-              <a:t>alta</a:t>
-            </a:r>
-            <a:r>
-              <a:rPr lang="es-ES" sz="1200" dirty="0">
-                <a:latin typeface="Bahnschrift" panose="020B0502040204020203" pitchFamily="34" charset="0"/>
-              </a:rPr>
-              <a:t> probabilidad de recompra:</a:t>
-            </a:r>
-          </a:p>
-          <a:p>
-            <a:pPr marL="171450" indent="-171450"/>
-            <a:r>
-              <a:rPr lang="es-ES" sz="1200" dirty="0">
-                <a:latin typeface="Bahnschrift" panose="020B0502040204020203" pitchFamily="34" charset="0"/>
-              </a:rPr>
-              <a:t>Programas de fidelización</a:t>
-            </a:r>
-          </a:p>
-          <a:p>
-            <a:pPr marL="171450" indent="-171450"/>
-            <a:r>
-              <a:rPr lang="es-ES" sz="1200" dirty="0" err="1">
-                <a:latin typeface="Bahnschrift" panose="020B0502040204020203" pitchFamily="34" charset="0"/>
-              </a:rPr>
-              <a:t>Corss-selling</a:t>
-            </a:r>
-            <a:r>
-              <a:rPr lang="es-ES" sz="1200" dirty="0">
-                <a:latin typeface="Bahnschrift" panose="020B0502040204020203" pitchFamily="34" charset="0"/>
-              </a:rPr>
-              <a:t> y </a:t>
-            </a:r>
-            <a:r>
-              <a:rPr lang="es-ES" sz="1200" dirty="0" err="1">
-                <a:latin typeface="Bahnschrift" panose="020B0502040204020203" pitchFamily="34" charset="0"/>
-              </a:rPr>
-              <a:t>upselling</a:t>
-            </a:r>
-            <a:endParaRPr lang="es-ES" sz="1200" dirty="0">
-              <a:latin typeface="Bahnschrift" panose="020B0502040204020203" pitchFamily="34" charset="0"/>
-            </a:endParaRPr>
-          </a:p>
-          <a:p>
-            <a:pPr marL="171450" indent="-171450"/>
-            <a:r>
-              <a:rPr lang="es-ES" sz="1200" dirty="0">
-                <a:latin typeface="Bahnschrift" panose="020B0502040204020203" pitchFamily="34" charset="0"/>
-              </a:rPr>
-              <a:t>Recomendaciones personalizadas</a:t>
-            </a:r>
-          </a:p>
-          <a:p>
-            <a:pPr marL="0" lvl="0" indent="0" algn="l" rtl="0">
-              <a:spcBef>
-                <a:spcPts val="0"/>
-              </a:spcBef>
-              <a:spcAft>
-                <a:spcPts val="0"/>
-              </a:spcAft>
-              <a:buNone/>
-            </a:pPr>
-            <a:endParaRPr lang="es-ES" sz="1200" dirty="0">
-              <a:latin typeface="Bahnschrift" panose="020B0502040204020203" pitchFamily="34" charset="0"/>
-            </a:endParaRPr>
-          </a:p>
-          <a:p>
-            <a:pPr marL="0" lvl="0" indent="0" algn="l" rtl="0">
-              <a:spcBef>
-                <a:spcPts val="0"/>
-              </a:spcBef>
-              <a:spcAft>
-                <a:spcPts val="0"/>
-              </a:spcAft>
-              <a:buNone/>
-            </a:pPr>
-            <a:r>
-              <a:rPr lang="es-ES" sz="1200" dirty="0">
-                <a:latin typeface="Bahnschrift" panose="020B0502040204020203" pitchFamily="34" charset="0"/>
-              </a:rPr>
-              <a:t>Clientes con </a:t>
-            </a:r>
-            <a:r>
-              <a:rPr lang="es-ES" sz="1200" b="1" dirty="0">
-                <a:latin typeface="Bahnschrift" panose="020B0502040204020203" pitchFamily="34" charset="0"/>
-              </a:rPr>
-              <a:t>baja</a:t>
-            </a:r>
-            <a:r>
-              <a:rPr lang="es-ES" sz="1200" dirty="0">
-                <a:latin typeface="Bahnschrift" panose="020B0502040204020203" pitchFamily="34" charset="0"/>
-              </a:rPr>
-              <a:t> probabilidad de recompra:</a:t>
-            </a:r>
-          </a:p>
-          <a:p>
-            <a:pPr marL="171450" indent="-171450"/>
-            <a:r>
-              <a:rPr lang="es-ES" sz="1200" dirty="0">
-                <a:latin typeface="Bahnschrift" panose="020B0502040204020203" pitchFamily="34" charset="0"/>
-              </a:rPr>
-              <a:t>Campañas de reactivación</a:t>
-            </a:r>
-          </a:p>
-          <a:p>
-            <a:pPr marL="171450" indent="-171450"/>
-            <a:r>
-              <a:rPr lang="es-ES" sz="1200" dirty="0">
-                <a:latin typeface="Bahnschrift" panose="020B0502040204020203" pitchFamily="34" charset="0"/>
-              </a:rPr>
-              <a:t>Descuentos o incentivos</a:t>
-            </a:r>
-          </a:p>
-          <a:p>
-            <a:pPr marL="171450" indent="-171450"/>
-            <a:r>
-              <a:rPr lang="es-ES" sz="1200" dirty="0">
-                <a:latin typeface="Bahnschrift" panose="020B0502040204020203" pitchFamily="34" charset="0"/>
-              </a:rPr>
-              <a:t>Ofertas limitadas y Segmentación</a:t>
-            </a:r>
-            <a:endParaRPr sz="1200" dirty="0">
-              <a:latin typeface="Bahnschrift" panose="020B0502040204020203" pitchFamily="34" charset="0"/>
-            </a:endParaRPr>
-          </a:p>
-        </p:txBody>
-      </p:sp>
-      <p:sp>
-        <p:nvSpPr>
           <p:cNvPr id="25" name="Google Shape;97;p17">
             <a:extLst>
               <a:ext uri="{FF2B5EF4-FFF2-40B4-BE49-F238E27FC236}">
@@ -9011,8 +8168,8 @@
         </p:nvSpPr>
         <p:spPr>
           <a:xfrm>
-            <a:off x="4746811" y="2018519"/>
-            <a:ext cx="4085488" cy="2347500"/>
+            <a:off x="311700" y="3904770"/>
+            <a:ext cx="6725721" cy="875125"/>
           </a:xfrm>
           <a:prstGeom prst="rect">
             <a:avLst/>
@@ -9288,37 +8445,7 @@
               <a:rPr lang="es-ES" sz="1200" dirty="0">
                 <a:latin typeface="Bahnschrift" panose="020B0502040204020203" pitchFamily="34" charset="0"/>
               </a:rPr>
-              <a:t>Mejorar modelo actual de </a:t>
-            </a:r>
-            <a:r>
-              <a:rPr lang="es-ES" sz="1200" dirty="0" err="1">
-                <a:latin typeface="Bahnschrift" panose="020B0502040204020203" pitchFamily="34" charset="0"/>
-              </a:rPr>
-              <a:t>XGBoost</a:t>
-            </a:r>
-            <a:endParaRPr lang="es-ES" sz="1200" dirty="0">
-              <a:latin typeface="Bahnschrift" panose="020B0502040204020203" pitchFamily="34" charset="0"/>
-            </a:endParaRPr>
-          </a:p>
-          <a:p>
-            <a:pPr marL="228600" indent="-228600">
-              <a:buFont typeface="Arial"/>
-              <a:buAutoNum type="arabicPeriod"/>
-            </a:pPr>
-            <a:endParaRPr lang="es-ES" sz="1200" dirty="0">
-              <a:latin typeface="Bahnschrift" panose="020B0502040204020203" pitchFamily="34" charset="0"/>
-            </a:endParaRPr>
-          </a:p>
-          <a:p>
-            <a:pPr marL="228600" indent="-228600">
-              <a:buFont typeface="Arial"/>
-              <a:buAutoNum type="arabicPeriod"/>
-            </a:pPr>
-            <a:r>
-              <a:rPr lang="es-ES" sz="1200" dirty="0">
-                <a:latin typeface="Bahnschrift" panose="020B0502040204020203" pitchFamily="34" charset="0"/>
-              </a:rPr>
-              <a:t>Exploración con modelos más sofisticados</a:t>
+              <a:t>Investigar agrupaciones de temas más concretos</a:t>
             </a:r>
           </a:p>
           <a:p>
@@ -9339,68 +8466,49 @@
               <a:rPr lang="es-ES" sz="1200" dirty="0">
                 <a:latin typeface="Bahnschrift" panose="020B0502040204020203" pitchFamily="34" charset="0"/>
               </a:rPr>
-              <a:t>Segmentación No supervisada de clientes</a:t>
+              <a:t>Identificar causas concretas de las reseñas negativas</a:t>
             </a:r>
           </a:p>
           <a:p>
-            <a:pPr marL="228600" indent="-228600">
-              <a:buFont typeface="Arial"/>
-              <a:buAutoNum type="arabicPeriod"/>
+            <a:pPr marL="0" indent="0">
+              <a:buNone/>
             </a:pPr>
-            <a:endParaRPr lang="es-ES" sz="1200" dirty="0">
-              <a:latin typeface="Bahnschrift" panose="020B0502040204020203" pitchFamily="34" charset="0"/>
-            </a:endParaRPr>
-          </a:p>
-          <a:p>
-            <a:pPr marL="228600" indent="-228600">
-              <a:buFont typeface="Arial"/>
-              <a:buAutoNum type="arabicPeriod"/>
-            </a:pPr>
-            <a:r>
-              <a:rPr lang="es-ES" sz="1200" dirty="0">
-                <a:latin typeface="Bahnschrift" panose="020B0502040204020203" pitchFamily="34" charset="0"/>
-              </a:rPr>
-              <a:t>Sistemas de Recomendación</a:t>
-            </a:r>
-          </a:p>
-          <a:p>
-            <a:pPr marL="228600" indent="-228600">
-              <a:buFont typeface="Arial"/>
-              <a:buAutoNum type="arabicPeriod"/>
-            </a:pPr>
-            <a:endParaRPr lang="es-ES" sz="1200" dirty="0">
-              <a:latin typeface="Bahnschrift" panose="020B0502040204020203" pitchFamily="34" charset="0"/>
-            </a:endParaRPr>
-          </a:p>
-          <a:p>
-            <a:pPr marL="228600" indent="-228600">
-              <a:buFont typeface="Arial"/>
-              <a:buAutoNum type="arabicPeriod"/>
-            </a:pPr>
-            <a:r>
-              <a:rPr lang="es-ES" sz="1200" dirty="0" err="1">
-                <a:latin typeface="Bahnschrift" panose="020B0502040204020203" pitchFamily="34" charset="0"/>
-              </a:rPr>
-              <a:t>Deploy</a:t>
-            </a:r>
-            <a:r>
-              <a:rPr lang="es-ES" sz="1200" dirty="0">
-                <a:latin typeface="Bahnschrift" panose="020B0502040204020203" pitchFamily="34" charset="0"/>
-              </a:rPr>
-              <a:t> y Monitorización + Modelo </a:t>
-            </a:r>
-            <a:r>
-              <a:rPr lang="es-ES" sz="1200" dirty="0" err="1">
-                <a:latin typeface="Bahnschrift" panose="020B0502040204020203" pitchFamily="34" charset="0"/>
-              </a:rPr>
-              <a:t>MarketingMix</a:t>
-            </a:r>
             <a:endParaRPr lang="es-ES" sz="1200" dirty="0">
               <a:latin typeface="Bahnschrift" panose="020B0502040204020203" pitchFamily="34" charset="0"/>
             </a:endParaRPr>
           </a:p>
         </p:txBody>
       </p:sp>
+      <p:pic>
+        <p:nvPicPr>
+          <p:cNvPr id="3" name="Imagen 2">
+            <a:extLst>
+              <a:ext uri="{FF2B5EF4-FFF2-40B4-BE49-F238E27FC236}">
+                <a16:creationId xmlns:a16="http://schemas.microsoft.com/office/drawing/2014/main" id="{F02CC19C-1805-4B35-B5D9-322CE88F67E4}"/>
+              </a:ext>
+            </a:extLst>
+          </p:cNvPr>
+          <p:cNvPicPr>
+            <a:picLocks noChangeAspect="1"/>
+          </p:cNvPicPr>
+          <p:nvPr/>
+        </p:nvPicPr>
+        <p:blipFill>
+          <a:blip r:embed="rId3"/>
+          <a:stretch>
+            <a:fillRect/>
+          </a:stretch>
+        </p:blipFill>
+        <p:spPr>
+          <a:xfrm>
+            <a:off x="314288" y="1562639"/>
+            <a:ext cx="8420986" cy="1498471"/>
+          </a:xfrm>
+          <a:prstGeom prst="rect">
+            <a:avLst/>
+          </a:prstGeom>
+        </p:spPr>
+      </p:pic>
     </p:spTree>
     <p:extLst>
       <p:ext uri="{BB962C8B-B14F-4D97-AF65-F5344CB8AC3E}">

--- a/recursos/Presentación.pptx
+++ b/recursos/Presentación.pptx
@@ -6992,7 +6992,7 @@
               <a:rPr lang="es-ES" b="1" dirty="0">
                 <a:latin typeface="Bahnschrift" panose="020B0502040204020203" pitchFamily="34" charset="0"/>
               </a:rPr>
-              <a:t>¿Qué opinión tienen los clientes de nuestros servicios/productos?</a:t>
+              <a:t>¿Qué opinión tienen los clientes de los servicios/productos?</a:t>
             </a:r>
           </a:p>
           <a:p>
@@ -7010,7 +7010,7 @@
               <a:rPr lang="es-ES" b="1" dirty="0">
                 <a:latin typeface="Bahnschrift" panose="020B0502040204020203" pitchFamily="34" charset="0"/>
               </a:rPr>
-              <a:t>¿Cuál es nuestro posicionamiento en el mercado?</a:t>
+              <a:t>¿Cuál es el posicionamiento en el mercado?</a:t>
             </a:r>
           </a:p>
         </p:txBody>
